--- a/presentation/Walmart - Fraud Risk Analysis in Delivery Operations.pptx
+++ b/presentation/Walmart - Fraud Risk Analysis in Delivery Operations.pptx
@@ -5,7 +5,7 @@
     <p:sldMasterId id="2147483648" r:id="rId1"/>
   </p:sldMasterIdLst>
   <p:notesMasterIdLst>
-    <p:notesMasterId r:id="rId47"/>
+    <p:notesMasterId r:id="rId49"/>
   </p:notesMasterIdLst>
   <p:sldIdLst>
     <p:sldId id="256" r:id="rId2"/>
@@ -51,8 +51,10 @@
     <p:sldId id="303" r:id="rId42"/>
     <p:sldId id="302" r:id="rId43"/>
     <p:sldId id="300" r:id="rId44"/>
-    <p:sldId id="301" r:id="rId45"/>
-    <p:sldId id="259" r:id="rId46"/>
+    <p:sldId id="304" r:id="rId45"/>
+    <p:sldId id="306" r:id="rId46"/>
+    <p:sldId id="307" r:id="rId47"/>
+    <p:sldId id="259" r:id="rId48"/>
   </p:sldIdLst>
   <p:sldSz cx="12192000" cy="6858000"/>
   <p:notesSz cx="6858000" cy="9144000"/>
@@ -3163,6 +3165,18 @@
   <p:clrMapOvr>
     <a:masterClrMapping/>
   </p:clrMapOvr>
+  <mc:AlternateContent xmlns:mc="http://schemas.openxmlformats.org/markup-compatibility/2006">
+    <mc:Choice xmlns:p14="http://schemas.microsoft.com/office/powerpoint/2010/main" Requires="p14">
+      <p:transition spd="med" p14:dur="700">
+        <p:fade/>
+      </p:transition>
+    </mc:Choice>
+    <mc:Fallback>
+      <p:transition spd="med">
+        <p:fade/>
+      </p:transition>
+    </mc:Fallback>
+  </mc:AlternateContent>
 </p:sld>
 </file>
 
@@ -3288,6 +3302,18 @@
   <p:clrMapOvr>
     <a:masterClrMapping/>
   </p:clrMapOvr>
+  <mc:AlternateContent xmlns:mc="http://schemas.openxmlformats.org/markup-compatibility/2006">
+    <mc:Choice xmlns:p14="http://schemas.microsoft.com/office/powerpoint/2010/main" Requires="p14">
+      <p:transition spd="med" p14:dur="700">
+        <p:fade/>
+      </p:transition>
+    </mc:Choice>
+    <mc:Fallback>
+      <p:transition spd="med">
+        <p:fade/>
+      </p:transition>
+    </mc:Fallback>
+  </mc:AlternateContent>
 </p:sld>
 </file>
 
@@ -4217,6 +4243,18 @@
   <p:clrMapOvr>
     <a:masterClrMapping/>
   </p:clrMapOvr>
+  <mc:AlternateContent xmlns:mc="http://schemas.openxmlformats.org/markup-compatibility/2006">
+    <mc:Choice xmlns:p14="http://schemas.microsoft.com/office/powerpoint/2010/main" Requires="p14">
+      <p:transition spd="med" p14:dur="700">
+        <p:fade/>
+      </p:transition>
+    </mc:Choice>
+    <mc:Fallback>
+      <p:transition spd="med">
+        <p:fade/>
+      </p:transition>
+    </mc:Fallback>
+  </mc:AlternateContent>
 </p:sld>
 </file>
 
@@ -4843,6 +4881,18 @@
   <p:clrMapOvr>
     <a:masterClrMapping/>
   </p:clrMapOvr>
+  <mc:AlternateContent xmlns:mc="http://schemas.openxmlformats.org/markup-compatibility/2006">
+    <mc:Choice xmlns:p14="http://schemas.microsoft.com/office/powerpoint/2010/main" Requires="p14">
+      <p:transition spd="med" p14:dur="700">
+        <p:fade/>
+      </p:transition>
+    </mc:Choice>
+    <mc:Fallback>
+      <p:transition spd="med">
+        <p:fade/>
+      </p:transition>
+    </mc:Fallback>
+  </mc:AlternateContent>
 </p:sld>
 </file>
 
@@ -5647,6 +5697,18 @@
   <p:clrMapOvr>
     <a:masterClrMapping/>
   </p:clrMapOvr>
+  <mc:AlternateContent xmlns:mc="http://schemas.openxmlformats.org/markup-compatibility/2006">
+    <mc:Choice xmlns:p14="http://schemas.microsoft.com/office/powerpoint/2010/main" Requires="p14">
+      <p:transition spd="med" p14:dur="700">
+        <p:fade/>
+      </p:transition>
+    </mc:Choice>
+    <mc:Fallback>
+      <p:transition spd="med">
+        <p:fade/>
+      </p:transition>
+    </mc:Fallback>
+  </mc:AlternateContent>
 </p:sld>
 </file>
 
@@ -6421,6 +6483,18 @@
   <p:clrMapOvr>
     <a:masterClrMapping/>
   </p:clrMapOvr>
+  <mc:AlternateContent xmlns:mc="http://schemas.openxmlformats.org/markup-compatibility/2006">
+    <mc:Choice xmlns:p14="http://schemas.microsoft.com/office/powerpoint/2010/main" Requires="p14">
+      <p:transition spd="med" p14:dur="700">
+        <p:fade/>
+      </p:transition>
+    </mc:Choice>
+    <mc:Fallback>
+      <p:transition spd="med">
+        <p:fade/>
+      </p:transition>
+    </mc:Fallback>
+  </mc:AlternateContent>
 </p:sld>
 </file>
 
@@ -7178,6 +7252,18 @@
   <p:clrMapOvr>
     <a:masterClrMapping/>
   </p:clrMapOvr>
+  <mc:AlternateContent xmlns:mc="http://schemas.openxmlformats.org/markup-compatibility/2006">
+    <mc:Choice xmlns:p14="http://schemas.microsoft.com/office/powerpoint/2010/main" Requires="p14">
+      <p:transition spd="med" p14:dur="700">
+        <p:fade/>
+      </p:transition>
+    </mc:Choice>
+    <mc:Fallback>
+      <p:transition spd="med">
+        <p:fade/>
+      </p:transition>
+    </mc:Fallback>
+  </mc:AlternateContent>
 </p:sld>
 </file>
 
@@ -8034,6 +8120,18 @@
   <p:clrMapOvr>
     <a:masterClrMapping/>
   </p:clrMapOvr>
+  <mc:AlternateContent xmlns:mc="http://schemas.openxmlformats.org/markup-compatibility/2006">
+    <mc:Choice xmlns:p14="http://schemas.microsoft.com/office/powerpoint/2010/main" Requires="p14">
+      <p:transition spd="med" p14:dur="700">
+        <p:fade/>
+      </p:transition>
+    </mc:Choice>
+    <mc:Fallback>
+      <p:transition spd="med">
+        <p:fade/>
+      </p:transition>
+    </mc:Fallback>
+  </mc:AlternateContent>
 </p:sld>
 </file>
 
@@ -8846,6 +8944,18 @@
   <p:clrMapOvr>
     <a:masterClrMapping/>
   </p:clrMapOvr>
+  <mc:AlternateContent xmlns:mc="http://schemas.openxmlformats.org/markup-compatibility/2006">
+    <mc:Choice xmlns:p14="http://schemas.microsoft.com/office/powerpoint/2010/main" Requires="p14">
+      <p:transition spd="med" p14:dur="700">
+        <p:fade/>
+      </p:transition>
+    </mc:Choice>
+    <mc:Fallback>
+      <p:transition spd="med">
+        <p:fade/>
+      </p:transition>
+    </mc:Fallback>
+  </mc:AlternateContent>
 </p:sld>
 </file>
 
@@ -9703,6 +9813,18 @@
   <p:clrMapOvr>
     <a:masterClrMapping/>
   </p:clrMapOvr>
+  <mc:AlternateContent xmlns:mc="http://schemas.openxmlformats.org/markup-compatibility/2006">
+    <mc:Choice xmlns:p14="http://schemas.microsoft.com/office/powerpoint/2010/main" Requires="p14">
+      <p:transition spd="med" p14:dur="700">
+        <p:fade/>
+      </p:transition>
+    </mc:Choice>
+    <mc:Fallback>
+      <p:transition spd="med">
+        <p:fade/>
+      </p:transition>
+    </mc:Fallback>
+  </mc:AlternateContent>
 </p:sld>
 </file>
 
@@ -10376,6 +10498,18 @@
   <p:clrMapOvr>
     <a:masterClrMapping/>
   </p:clrMapOvr>
+  <mc:AlternateContent xmlns:mc="http://schemas.openxmlformats.org/markup-compatibility/2006">
+    <mc:Choice xmlns:p14="http://schemas.microsoft.com/office/powerpoint/2010/main" Requires="p14">
+      <p:transition spd="med" p14:dur="700">
+        <p:fade/>
+      </p:transition>
+    </mc:Choice>
+    <mc:Fallback>
+      <p:transition spd="med">
+        <p:fade/>
+      </p:transition>
+    </mc:Fallback>
+  </mc:AlternateContent>
 </p:sld>
 </file>
 
@@ -10576,6 +10710,18 @@
   <p:clrMapOvr>
     <a:masterClrMapping/>
   </p:clrMapOvr>
+  <mc:AlternateContent xmlns:mc="http://schemas.openxmlformats.org/markup-compatibility/2006">
+    <mc:Choice xmlns:p14="http://schemas.microsoft.com/office/powerpoint/2010/main" Requires="p14">
+      <p:transition spd="med" p14:dur="700">
+        <p:fade/>
+      </p:transition>
+    </mc:Choice>
+    <mc:Fallback>
+      <p:transition spd="med">
+        <p:fade/>
+      </p:transition>
+    </mc:Fallback>
+  </mc:AlternateContent>
 </p:sld>
 </file>
 
@@ -12985,6 +13131,18 @@
   <p:clrMapOvr>
     <a:masterClrMapping/>
   </p:clrMapOvr>
+  <mc:AlternateContent xmlns:mc="http://schemas.openxmlformats.org/markup-compatibility/2006">
+    <mc:Choice xmlns:p14="http://schemas.microsoft.com/office/powerpoint/2010/main" Requires="p14">
+      <p:transition spd="med" p14:dur="700">
+        <p:fade/>
+      </p:transition>
+    </mc:Choice>
+    <mc:Fallback>
+      <p:transition spd="med">
+        <p:fade/>
+      </p:transition>
+    </mc:Fallback>
+  </mc:AlternateContent>
 </p:sld>
 </file>
 
@@ -13812,6 +13970,18 @@
   <p:clrMapOvr>
     <a:masterClrMapping/>
   </p:clrMapOvr>
+  <mc:AlternateContent xmlns:mc="http://schemas.openxmlformats.org/markup-compatibility/2006">
+    <mc:Choice xmlns:p14="http://schemas.microsoft.com/office/powerpoint/2010/main" Requires="p14">
+      <p:transition spd="med" p14:dur="700">
+        <p:fade/>
+      </p:transition>
+    </mc:Choice>
+    <mc:Fallback>
+      <p:transition spd="med">
+        <p:fade/>
+      </p:transition>
+    </mc:Fallback>
+  </mc:AlternateContent>
 </p:sld>
 </file>
 
@@ -14693,6 +14863,18 @@
   <p:clrMapOvr>
     <a:masterClrMapping/>
   </p:clrMapOvr>
+  <mc:AlternateContent xmlns:mc="http://schemas.openxmlformats.org/markup-compatibility/2006">
+    <mc:Choice xmlns:p14="http://schemas.microsoft.com/office/powerpoint/2010/main" Requires="p14">
+      <p:transition spd="med" p14:dur="700">
+        <p:fade/>
+      </p:transition>
+    </mc:Choice>
+    <mc:Fallback>
+      <p:transition spd="med">
+        <p:fade/>
+      </p:transition>
+    </mc:Fallback>
+  </mc:AlternateContent>
 </p:sld>
 </file>
 
@@ -15462,6 +15644,18 @@
   <p:clrMapOvr>
     <a:masterClrMapping/>
   </p:clrMapOvr>
+  <mc:AlternateContent xmlns:mc="http://schemas.openxmlformats.org/markup-compatibility/2006">
+    <mc:Choice xmlns:p14="http://schemas.microsoft.com/office/powerpoint/2010/main" Requires="p14">
+      <p:transition spd="med" p14:dur="700">
+        <p:fade/>
+      </p:transition>
+    </mc:Choice>
+    <mc:Fallback>
+      <p:transition spd="med">
+        <p:fade/>
+      </p:transition>
+    </mc:Fallback>
+  </mc:AlternateContent>
 </p:sld>
 </file>
 
@@ -16130,6 +16324,18 @@
   <p:clrMapOvr>
     <a:masterClrMapping/>
   </p:clrMapOvr>
+  <mc:AlternateContent xmlns:mc="http://schemas.openxmlformats.org/markup-compatibility/2006">
+    <mc:Choice xmlns:p14="http://schemas.microsoft.com/office/powerpoint/2010/main" Requires="p14">
+      <p:transition spd="med" p14:dur="700">
+        <p:fade/>
+      </p:transition>
+    </mc:Choice>
+    <mc:Fallback>
+      <p:transition spd="med">
+        <p:fade/>
+      </p:transition>
+    </mc:Fallback>
+  </mc:AlternateContent>
 </p:sld>
 </file>
 
@@ -16362,6 +16568,18 @@
   <p:clrMapOvr>
     <a:masterClrMapping/>
   </p:clrMapOvr>
+  <mc:AlternateContent xmlns:mc="http://schemas.openxmlformats.org/markup-compatibility/2006">
+    <mc:Choice xmlns:p14="http://schemas.microsoft.com/office/powerpoint/2010/main" Requires="p14">
+      <p:transition spd="med" p14:dur="700">
+        <p:fade/>
+      </p:transition>
+    </mc:Choice>
+    <mc:Fallback>
+      <p:transition spd="med">
+        <p:fade/>
+      </p:transition>
+    </mc:Fallback>
+  </mc:AlternateContent>
 </p:sld>
 </file>
 
@@ -21337,6 +21555,18 @@
   <p:clrMapOvr>
     <a:masterClrMapping/>
   </p:clrMapOvr>
+  <mc:AlternateContent xmlns:mc="http://schemas.openxmlformats.org/markup-compatibility/2006">
+    <mc:Choice xmlns:p14="http://schemas.microsoft.com/office/powerpoint/2010/main" Requires="p14">
+      <p:transition spd="med" p14:dur="700">
+        <p:fade/>
+      </p:transition>
+    </mc:Choice>
+    <mc:Fallback>
+      <p:transition spd="med">
+        <p:fade/>
+      </p:transition>
+    </mc:Fallback>
+  </mc:AlternateContent>
 </p:sld>
 </file>
 
@@ -27094,6 +27324,18 @@
   <p:clrMapOvr>
     <a:masterClrMapping/>
   </p:clrMapOvr>
+  <mc:AlternateContent xmlns:mc="http://schemas.openxmlformats.org/markup-compatibility/2006">
+    <mc:Choice xmlns:p14="http://schemas.microsoft.com/office/powerpoint/2010/main" Requires="p14">
+      <p:transition spd="med" p14:dur="700">
+        <p:fade/>
+      </p:transition>
+    </mc:Choice>
+    <mc:Fallback>
+      <p:transition spd="med">
+        <p:fade/>
+      </p:transition>
+    </mc:Fallback>
+  </mc:AlternateContent>
 </p:sld>
 </file>
 
@@ -27636,6 +27878,18 @@
   <p:clrMapOvr>
     <a:masterClrMapping/>
   </p:clrMapOvr>
+  <mc:AlternateContent xmlns:mc="http://schemas.openxmlformats.org/markup-compatibility/2006">
+    <mc:Choice xmlns:p14="http://schemas.microsoft.com/office/powerpoint/2010/main" Requires="p14">
+      <p:transition spd="med" p14:dur="700">
+        <p:fade/>
+      </p:transition>
+    </mc:Choice>
+    <mc:Fallback>
+      <p:transition spd="med">
+        <p:fade/>
+      </p:transition>
+    </mc:Fallback>
+  </mc:AlternateContent>
 </p:sld>
 </file>
 
@@ -28222,6 +28476,18 @@
   <p:clrMapOvr>
     <a:masterClrMapping/>
   </p:clrMapOvr>
+  <mc:AlternateContent xmlns:mc="http://schemas.openxmlformats.org/markup-compatibility/2006">
+    <mc:Choice xmlns:p14="http://schemas.microsoft.com/office/powerpoint/2010/main" Requires="p14">
+      <p:transition spd="med" p14:dur="700">
+        <p:fade/>
+      </p:transition>
+    </mc:Choice>
+    <mc:Fallback>
+      <p:transition spd="med">
+        <p:fade/>
+      </p:transition>
+    </mc:Fallback>
+  </mc:AlternateContent>
 </p:sld>
 </file>
 
@@ -28487,6 +28753,18 @@
   <p:clrMapOvr>
     <a:masterClrMapping/>
   </p:clrMapOvr>
+  <mc:AlternateContent xmlns:mc="http://schemas.openxmlformats.org/markup-compatibility/2006">
+    <mc:Choice xmlns:p14="http://schemas.microsoft.com/office/powerpoint/2010/main" Requires="p14">
+      <p:transition spd="med" p14:dur="700">
+        <p:fade/>
+      </p:transition>
+    </mc:Choice>
+    <mc:Fallback>
+      <p:transition spd="med">
+        <p:fade/>
+      </p:transition>
+    </mc:Fallback>
+  </mc:AlternateContent>
 </p:sld>
 </file>
 
@@ -28858,6 +29136,18 @@
   <p:clrMapOvr>
     <a:masterClrMapping/>
   </p:clrMapOvr>
+  <mc:AlternateContent xmlns:mc="http://schemas.openxmlformats.org/markup-compatibility/2006">
+    <mc:Choice xmlns:p14="http://schemas.microsoft.com/office/powerpoint/2010/main" Requires="p14">
+      <p:transition spd="med" p14:dur="700">
+        <p:fade/>
+      </p:transition>
+    </mc:Choice>
+    <mc:Fallback>
+      <p:transition spd="med">
+        <p:fade/>
+      </p:transition>
+    </mc:Fallback>
+  </mc:AlternateContent>
 </p:sld>
 </file>
 
@@ -29171,6 +29461,18 @@
   <p:clrMapOvr>
     <a:masterClrMapping/>
   </p:clrMapOvr>
+  <mc:AlternateContent xmlns:mc="http://schemas.openxmlformats.org/markup-compatibility/2006">
+    <mc:Choice xmlns:p14="http://schemas.microsoft.com/office/powerpoint/2010/main" Requires="p14">
+      <p:transition spd="med" p14:dur="700">
+        <p:fade/>
+      </p:transition>
+    </mc:Choice>
+    <mc:Fallback>
+      <p:transition spd="med">
+        <p:fade/>
+      </p:transition>
+    </mc:Fallback>
+  </mc:AlternateContent>
 </p:sld>
 </file>
 
@@ -29397,6 +29699,18 @@
   <p:clrMapOvr>
     <a:masterClrMapping/>
   </p:clrMapOvr>
+  <mc:AlternateContent xmlns:mc="http://schemas.openxmlformats.org/markup-compatibility/2006">
+    <mc:Choice xmlns:p14="http://schemas.microsoft.com/office/powerpoint/2010/main" Requires="p14">
+      <p:transition spd="med" p14:dur="700">
+        <p:fade/>
+      </p:transition>
+    </mc:Choice>
+    <mc:Fallback>
+      <p:transition spd="med">
+        <p:fade/>
+      </p:transition>
+    </mc:Fallback>
+  </mc:AlternateContent>
 </p:sld>
 </file>
 
@@ -30452,6 +30766,18 @@
   <p:clrMapOvr>
     <a:masterClrMapping/>
   </p:clrMapOvr>
+  <mc:AlternateContent xmlns:mc="http://schemas.openxmlformats.org/markup-compatibility/2006">
+    <mc:Choice xmlns:p14="http://schemas.microsoft.com/office/powerpoint/2010/main" Requires="p14">
+      <p:transition spd="med" p14:dur="700">
+        <p:fade/>
+      </p:transition>
+    </mc:Choice>
+    <mc:Fallback>
+      <p:transition spd="med">
+        <p:fade/>
+      </p:transition>
+    </mc:Fallback>
+  </mc:AlternateContent>
 </p:sld>
 </file>
 
@@ -30661,6 +30987,18 @@
   <p:clrMapOvr>
     <a:masterClrMapping/>
   </p:clrMapOvr>
+  <mc:AlternateContent xmlns:mc="http://schemas.openxmlformats.org/markup-compatibility/2006">
+    <mc:Choice xmlns:p14="http://schemas.microsoft.com/office/powerpoint/2010/main" Requires="p14">
+      <p:transition spd="med" p14:dur="700">
+        <p:fade/>
+      </p:transition>
+    </mc:Choice>
+    <mc:Fallback>
+      <p:transition spd="med">
+        <p:fade/>
+      </p:transition>
+    </mc:Fallback>
+  </mc:AlternateContent>
 </p:sld>
 </file>
 
@@ -31073,6 +31411,18 @@
   <p:clrMapOvr>
     <a:masterClrMapping/>
   </p:clrMapOvr>
+  <mc:AlternateContent xmlns:mc="http://schemas.openxmlformats.org/markup-compatibility/2006">
+    <mc:Choice xmlns:p14="http://schemas.microsoft.com/office/powerpoint/2010/main" Requires="p14">
+      <p:transition spd="med" p14:dur="700">
+        <p:fade/>
+      </p:transition>
+    </mc:Choice>
+    <mc:Fallback>
+      <p:transition spd="med">
+        <p:fade/>
+      </p:transition>
+    </mc:Fallback>
+  </mc:AlternateContent>
 </p:sld>
 </file>
 
@@ -31272,6 +31622,18 @@
   <p:clrMapOvr>
     <a:masterClrMapping/>
   </p:clrMapOvr>
+  <mc:AlternateContent xmlns:mc="http://schemas.openxmlformats.org/markup-compatibility/2006">
+    <mc:Choice xmlns:p14="http://schemas.microsoft.com/office/powerpoint/2010/main" Requires="p14">
+      <p:transition spd="med" p14:dur="700">
+        <p:fade/>
+      </p:transition>
+    </mc:Choice>
+    <mc:Fallback>
+      <p:transition spd="med">
+        <p:fade/>
+      </p:transition>
+    </mc:Fallback>
+  </mc:AlternateContent>
 </p:sld>
 </file>
 
@@ -31844,6 +32206,18 @@
   <p:clrMapOvr>
     <a:masterClrMapping/>
   </p:clrMapOvr>
+  <mc:AlternateContent xmlns:mc="http://schemas.openxmlformats.org/markup-compatibility/2006">
+    <mc:Choice xmlns:p14="http://schemas.microsoft.com/office/powerpoint/2010/main" Requires="p14">
+      <p:transition spd="med" p14:dur="700">
+        <p:fade/>
+      </p:transition>
+    </mc:Choice>
+    <mc:Fallback>
+      <p:transition spd="med">
+        <p:fade/>
+      </p:transition>
+    </mc:Fallback>
+  </mc:AlternateContent>
 </p:sld>
 </file>
 
@@ -32203,6 +32577,18 @@
   <p:clrMapOvr>
     <a:masterClrMapping/>
   </p:clrMapOvr>
+  <mc:AlternateContent xmlns:mc="http://schemas.openxmlformats.org/markup-compatibility/2006">
+    <mc:Choice xmlns:p14="http://schemas.microsoft.com/office/powerpoint/2010/main" Requires="p14">
+      <p:transition spd="med" p14:dur="700">
+        <p:fade/>
+      </p:transition>
+    </mc:Choice>
+    <mc:Fallback>
+      <p:transition spd="med">
+        <p:fade/>
+      </p:transition>
+    </mc:Fallback>
+  </mc:AlternateContent>
 </p:sld>
 </file>
 
@@ -32553,6 +32939,18 @@
   <p:clrMapOvr>
     <a:masterClrMapping/>
   </p:clrMapOvr>
+  <mc:AlternateContent xmlns:mc="http://schemas.openxmlformats.org/markup-compatibility/2006">
+    <mc:Choice xmlns:p14="http://schemas.microsoft.com/office/powerpoint/2010/main" Requires="p14">
+      <p:transition spd="med" p14:dur="700">
+        <p:fade/>
+      </p:transition>
+    </mc:Choice>
+    <mc:Fallback>
+      <p:transition spd="med">
+        <p:fade/>
+      </p:transition>
+    </mc:Fallback>
+  </mc:AlternateContent>
 </p:sld>
 </file>
 
@@ -32716,6 +33114,18 @@
   <p:clrMapOvr>
     <a:masterClrMapping/>
   </p:clrMapOvr>
+  <mc:AlternateContent xmlns:mc="http://schemas.openxmlformats.org/markup-compatibility/2006">
+    <mc:Choice xmlns:p14="http://schemas.microsoft.com/office/powerpoint/2010/main" Requires="p14">
+      <p:transition spd="med" p14:dur="700">
+        <p:fade/>
+      </p:transition>
+    </mc:Choice>
+    <mc:Fallback>
+      <p:transition spd="med">
+        <p:fade/>
+      </p:transition>
+    </mc:Fallback>
+  </mc:AlternateContent>
 </p:sld>
 </file>
 
@@ -32826,6 +33236,18 @@
   <p:clrMapOvr>
     <a:masterClrMapping/>
   </p:clrMapOvr>
+  <mc:AlternateContent xmlns:mc="http://schemas.openxmlformats.org/markup-compatibility/2006">
+    <mc:Choice xmlns:p14="http://schemas.microsoft.com/office/powerpoint/2010/main" Requires="p14">
+      <p:transition spd="med" p14:dur="700">
+        <p:fade/>
+      </p:transition>
+    </mc:Choice>
+    <mc:Fallback>
+      <p:transition spd="med">
+        <p:fade/>
+      </p:transition>
+    </mc:Fallback>
+  </mc:AlternateContent>
 </p:sld>
 </file>
 
@@ -33130,6 +33552,18 @@
   <p:clrMapOvr>
     <a:masterClrMapping/>
   </p:clrMapOvr>
+  <mc:AlternateContent xmlns:mc="http://schemas.openxmlformats.org/markup-compatibility/2006">
+    <mc:Choice xmlns:p14="http://schemas.microsoft.com/office/powerpoint/2010/main" Requires="p14">
+      <p:transition spd="med" p14:dur="700">
+        <p:fade/>
+      </p:transition>
+    </mc:Choice>
+    <mc:Fallback>
+      <p:transition spd="med">
+        <p:fade/>
+      </p:transition>
+    </mc:Fallback>
+  </mc:AlternateContent>
 </p:sld>
 </file>
 
@@ -33190,7 +33624,7 @@
                 <a:ea typeface="Calibri" panose="020F0502020204030204" pitchFamily="34" charset="0"/>
                 <a:cs typeface="Calibri" panose="020F0502020204030204" pitchFamily="34" charset="0"/>
               </a:rPr>
-              <a:t>6.Fraud Risk Score Simulator</a:t>
+              <a:t>7.Fraud Risk Score Simulator</a:t>
             </a:r>
           </a:p>
         </p:txBody>
@@ -33344,6 +33778,18 @@
   <p:clrMapOvr>
     <a:masterClrMapping/>
   </p:clrMapOvr>
+  <mc:AlternateContent xmlns:mc="http://schemas.openxmlformats.org/markup-compatibility/2006">
+    <mc:Choice xmlns:p14="http://schemas.microsoft.com/office/powerpoint/2010/main" Requires="p14">
+      <p:transition spd="med" p14:dur="700">
+        <p:fade/>
+      </p:transition>
+    </mc:Choice>
+    <mc:Fallback>
+      <p:transition spd="med">
+        <p:fade/>
+      </p:transition>
+    </mc:Fallback>
+  </mc:AlternateContent>
 </p:sld>
 </file>
 
@@ -33415,6 +33861,44 @@
           </a:p>
         </p:txBody>
       </p:sp>
+      <p:pic>
+        <p:nvPicPr>
+          <p:cNvPr id="4" name="Delivery Fraud Risk Simulator">
+            <a:hlinkClick r:id="" action="ppaction://media"/>
+            <a:extLst>
+              <a:ext uri="{FF2B5EF4-FFF2-40B4-BE49-F238E27FC236}">
+                <a16:creationId xmlns:a16="http://schemas.microsoft.com/office/drawing/2014/main" id="{1AB18D57-B2E5-42E5-4D13-F0FC2ACA02A3}"/>
+              </a:ext>
+            </a:extLst>
+          </p:cNvPr>
+          <p:cNvPicPr>
+            <a:picLocks noChangeAspect="1"/>
+          </p:cNvPicPr>
+          <p:nvPr>
+            <a:videoFile r:link="rId2"/>
+            <p:extLst>
+              <p:ext uri="{DAA4B4D4-6D71-4841-9C94-3DE7FCFB9230}">
+                <p14:media xmlns:p14="http://schemas.microsoft.com/office/powerpoint/2010/main" r:embed="rId1"/>
+              </p:ext>
+            </p:extLst>
+          </p:nvPr>
+        </p:nvPicPr>
+        <p:blipFill>
+          <a:blip r:embed="rId4"/>
+          <a:stretch>
+            <a:fillRect/>
+          </a:stretch>
+        </p:blipFill>
+        <p:spPr>
+          <a:xfrm>
+            <a:off x="1041149" y="1136209"/>
+            <a:ext cx="9216427" cy="4341138"/>
+          </a:xfrm>
+          <a:prstGeom prst="rect">
+            <a:avLst/>
+          </a:prstGeom>
+        </p:spPr>
+      </p:pic>
     </p:spTree>
     <p:extLst>
       <p:ext uri="{BB962C8B-B14F-4D97-AF65-F5344CB8AC3E}">
@@ -33425,6 +33909,153 @@
   <p:clrMapOvr>
     <a:masterClrMapping/>
   </p:clrMapOvr>
+  <mc:AlternateContent xmlns:mc="http://schemas.openxmlformats.org/markup-compatibility/2006">
+    <mc:Choice xmlns:p14="http://schemas.microsoft.com/office/powerpoint/2010/main" Requires="p14">
+      <p:transition spd="med" p14:dur="700">
+        <p:fade/>
+      </p:transition>
+    </mc:Choice>
+    <mc:Fallback>
+      <p:transition spd="med">
+        <p:fade/>
+      </p:transition>
+    </mc:Fallback>
+  </mc:AlternateContent>
+  <p:timing>
+    <p:tnLst>
+      <p:par>
+        <p:cTn id="1" dur="indefinite" restart="never" nodeType="tmRoot">
+          <p:childTnLst>
+            <p:seq concurrent="1" nextAc="seek">
+              <p:cTn id="2" dur="indefinite" nodeType="mainSeq">
+                <p:childTnLst>
+                  <p:par>
+                    <p:cTn id="3" fill="hold">
+                      <p:stCondLst>
+                        <p:cond delay="indefinite"/>
+                      </p:stCondLst>
+                      <p:childTnLst>
+                        <p:par>
+                          <p:cTn id="4" fill="hold">
+                            <p:stCondLst>
+                              <p:cond delay="0"/>
+                            </p:stCondLst>
+                            <p:childTnLst>
+                              <p:par>
+                                <p:cTn id="5" presetID="1" presetClass="mediacall" presetSubtype="0" fill="hold" nodeType="clickEffect">
+                                  <p:stCondLst>
+                                    <p:cond delay="0"/>
+                                  </p:stCondLst>
+                                  <p:childTnLst>
+                                    <p:cmd type="call" cmd="playFrom(0.0)">
+                                      <p:cBhvr>
+                                        <p:cTn id="6" dur="27168" fill="hold"/>
+                                        <p:tgtEl>
+                                          <p:spTgt spid="4"/>
+                                        </p:tgtEl>
+                                      </p:cBhvr>
+                                    </p:cmd>
+                                  </p:childTnLst>
+                                </p:cTn>
+                              </p:par>
+                            </p:childTnLst>
+                          </p:cTn>
+                        </p:par>
+                      </p:childTnLst>
+                    </p:cTn>
+                  </p:par>
+                </p:childTnLst>
+              </p:cTn>
+              <p:prevCondLst>
+                <p:cond evt="onPrev" delay="0">
+                  <p:tgtEl>
+                    <p:sldTgt/>
+                  </p:tgtEl>
+                </p:cond>
+              </p:prevCondLst>
+              <p:nextCondLst>
+                <p:cond evt="onNext" delay="0">
+                  <p:tgtEl>
+                    <p:sldTgt/>
+                  </p:tgtEl>
+                </p:cond>
+              </p:nextCondLst>
+            </p:seq>
+            <p:video>
+              <p:cMediaNode vol="80000">
+                <p:cTn id="7" fill="hold" display="0">
+                  <p:stCondLst>
+                    <p:cond delay="indefinite"/>
+                  </p:stCondLst>
+                </p:cTn>
+                <p:tgtEl>
+                  <p:spTgt spid="4"/>
+                </p:tgtEl>
+              </p:cMediaNode>
+            </p:video>
+            <p:seq concurrent="1" nextAc="seek">
+              <p:cTn id="8" restart="whenNotActive" fill="hold" evtFilter="cancelBubble" nodeType="interactiveSeq">
+                <p:stCondLst>
+                  <p:cond evt="onClick" delay="0">
+                    <p:tgtEl>
+                      <p:spTgt spid="4"/>
+                    </p:tgtEl>
+                  </p:cond>
+                </p:stCondLst>
+                <p:endSync evt="end" delay="0">
+                  <p:rtn val="all"/>
+                </p:endSync>
+                <p:childTnLst>
+                  <p:par>
+                    <p:cTn id="9" fill="hold">
+                      <p:stCondLst>
+                        <p:cond delay="0"/>
+                      </p:stCondLst>
+                      <p:childTnLst>
+                        <p:par>
+                          <p:cTn id="10" fill="hold">
+                            <p:stCondLst>
+                              <p:cond delay="0"/>
+                            </p:stCondLst>
+                            <p:childTnLst>
+                              <p:par>
+                                <p:cTn id="11" presetID="2" presetClass="mediacall" presetSubtype="0" fill="hold" nodeType="clickEffect">
+                                  <p:stCondLst>
+                                    <p:cond delay="0"/>
+                                  </p:stCondLst>
+                                  <p:childTnLst>
+                                    <p:cmd type="call" cmd="togglePause">
+                                      <p:cBhvr>
+                                        <p:cTn id="12" dur="1" fill="hold"/>
+                                        <p:tgtEl>
+                                          <p:spTgt spid="4"/>
+                                        </p:tgtEl>
+                                      </p:cBhvr>
+                                    </p:cmd>
+                                  </p:childTnLst>
+                                </p:cTn>
+                              </p:par>
+                            </p:childTnLst>
+                          </p:cTn>
+                        </p:par>
+                      </p:childTnLst>
+                    </p:cTn>
+                  </p:par>
+                </p:childTnLst>
+              </p:cTn>
+              <p:nextCondLst>
+                <p:cond evt="onClick" delay="0">
+                  <p:tgtEl>
+                    <p:spTgt spid="4"/>
+                  </p:tgtEl>
+                </p:cond>
+              </p:nextCondLst>
+            </p:seq>
+          </p:childTnLst>
+        </p:cTn>
+      </p:par>
+    </p:tnLst>
+  </p:timing>
 </p:sld>
 </file>
 
@@ -33436,7 +34067,7 @@
         <p:cNvPr id="1" name="">
           <a:extLst>
             <a:ext uri="{FF2B5EF4-FFF2-40B4-BE49-F238E27FC236}">
-              <a16:creationId xmlns:a16="http://schemas.microsoft.com/office/drawing/2014/main" id="{A951C385-C1D3-EDBA-98EB-133FB0BB8AF9}"/>
+              <a16:creationId xmlns:a16="http://schemas.microsoft.com/office/drawing/2014/main" id="{BA586683-F5D5-69CF-9BED-3F8B20CAE749}"/>
             </a:ext>
           </a:extLst>
         </p:cNvPr>
@@ -33456,7 +34087,7 @@
           <p:cNvPr id="2" name="Title 1">
             <a:extLst>
               <a:ext uri="{FF2B5EF4-FFF2-40B4-BE49-F238E27FC236}">
-                <a16:creationId xmlns:a16="http://schemas.microsoft.com/office/drawing/2014/main" id="{5BAA9D92-CD8E-535D-9F65-41C19C9C8247}"/>
+                <a16:creationId xmlns:a16="http://schemas.microsoft.com/office/drawing/2014/main" id="{96AD93A4-783C-2D79-E038-E8F75B758251}"/>
               </a:ext>
             </a:extLst>
           </p:cNvPr>
@@ -33469,7 +34100,7 @@
         </p:nvSpPr>
         <p:spPr>
           <a:xfrm>
-            <a:off x="462093" y="2242990"/>
+            <a:off x="457096" y="3998537"/>
             <a:ext cx="9288489" cy="1186010"/>
           </a:xfrm>
         </p:spPr>
@@ -33485,112 +34116,8 @@
                 <a:ea typeface="Calibri" panose="020F0502020204030204" pitchFamily="34" charset="0"/>
                 <a:cs typeface="Calibri" panose="020F0502020204030204" pitchFamily="34" charset="0"/>
               </a:rPr>
-              <a:t>7.Interactive Dashboard</a:t>
-            </a:r>
-          </a:p>
-        </p:txBody>
-      </p:sp>
-      <p:sp>
-        <p:nvSpPr>
-          <p:cNvPr id="3" name="Text Placeholder 2">
-            <a:extLst>
-              <a:ext uri="{FF2B5EF4-FFF2-40B4-BE49-F238E27FC236}">
-                <a16:creationId xmlns:a16="http://schemas.microsoft.com/office/drawing/2014/main" id="{D2BC2DC3-4AA8-50F1-C572-B2869FD7BDC3}"/>
-              </a:ext>
-            </a:extLst>
-          </p:cNvPr>
-          <p:cNvSpPr>
-            <a:spLocks noGrp="1"/>
-          </p:cNvSpPr>
-          <p:nvPr>
-            <p:ph type="body" idx="1"/>
-          </p:nvPr>
-        </p:nvSpPr>
-        <p:spPr>
-          <a:xfrm>
-            <a:off x="313769" y="3569747"/>
-            <a:ext cx="10477962" cy="3288254"/>
-          </a:xfrm>
-        </p:spPr>
-        <p:txBody>
-          <a:bodyPr>
-            <a:normAutofit fontScale="70000" lnSpcReduction="20000"/>
-          </a:bodyPr>
-          <a:lstStyle/>
-          <a:p>
-            <a:r>
-              <a:rPr lang="en-US" sz="4000" b="1" dirty="0">
-                <a:latin typeface="Calibri" panose="020F0502020204030204" pitchFamily="34" charset="0"/>
-                <a:ea typeface="Calibri" panose="020F0502020204030204" pitchFamily="34" charset="0"/>
-                <a:cs typeface="Calibri" panose="020F0502020204030204" pitchFamily="34" charset="0"/>
-              </a:rPr>
-              <a:t>A fraud risk simulator was developed using the Fraud Risk Framework scores.</a:t>
-            </a:r>
-          </a:p>
-          <a:p>
-            <a:r>
-              <a:rPr lang="en-US" sz="4000" b="1" dirty="0">
-                <a:latin typeface="Calibri" panose="020F0502020204030204" pitchFamily="34" charset="0"/>
-                <a:ea typeface="Calibri" panose="020F0502020204030204" pitchFamily="34" charset="0"/>
-                <a:cs typeface="Calibri" panose="020F0502020204030204" pitchFamily="34" charset="0"/>
-              </a:rPr>
-              <a:t>The tool estimates the risk level of a delivery based on operational, driver, customer, and product characteristics by aggregating segment-level risk scores.</a:t>
-            </a:r>
-          </a:p>
-          <a:p>
-            <a:br>
-              <a:rPr lang="en-US" sz="4000" b="1" dirty="0">
-                <a:latin typeface="Calibri" panose="020F0502020204030204" pitchFamily="34" charset="0"/>
-                <a:ea typeface="Calibri" panose="020F0502020204030204" pitchFamily="34" charset="0"/>
-                <a:cs typeface="Calibri" panose="020F0502020204030204" pitchFamily="34" charset="0"/>
-              </a:rPr>
-            </a:br>
-            <a:endParaRPr lang="en-US" sz="4000" b="1" dirty="0">
-              <a:latin typeface="Calibri" panose="020F0502020204030204" pitchFamily="34" charset="0"/>
-              <a:ea typeface="Calibri" panose="020F0502020204030204" pitchFamily="34" charset="0"/>
-              <a:cs typeface="Calibri" panose="020F0502020204030204" pitchFamily="34" charset="0"/>
-            </a:endParaRPr>
-          </a:p>
-          <a:p>
-            <a:r>
-              <a:rPr lang="en-US" sz="4000" b="1" dirty="0">
-                <a:latin typeface="Calibri" panose="020F0502020204030204" pitchFamily="34" charset="0"/>
-                <a:ea typeface="Calibri" panose="020F0502020204030204" pitchFamily="34" charset="0"/>
-                <a:cs typeface="Calibri" panose="020F0502020204030204" pitchFamily="34" charset="0"/>
-              </a:rPr>
-              <a:t>Link: https://delivery-fraud-risk-score-simulator-walmart.streamlit.app/</a:t>
-            </a:r>
-          </a:p>
-          <a:p>
-            <a:endParaRPr lang="en-US" sz="2800" dirty="0">
-              <a:latin typeface="Calibri" panose="020F0502020204030204" pitchFamily="34" charset="0"/>
-              <a:ea typeface="Calibri" panose="020F0502020204030204" pitchFamily="34" charset="0"/>
-              <a:cs typeface="Calibri" panose="020F0502020204030204" pitchFamily="34" charset="0"/>
-            </a:endParaRPr>
-          </a:p>
-          <a:p>
-            <a:pPr marL="342900" indent="-342900">
-              <a:buFont typeface="Arial" panose="020B0604020202020204" pitchFamily="34" charset="0"/>
-              <a:buChar char="•"/>
-            </a:pPr>
-            <a:endParaRPr lang="en-US" sz="3600" b="1" dirty="0">
-              <a:latin typeface="Calibri" panose="020F0502020204030204" pitchFamily="34" charset="0"/>
-              <a:ea typeface="Calibri" panose="020F0502020204030204" pitchFamily="34" charset="0"/>
-              <a:cs typeface="Calibri" panose="020F0502020204030204" pitchFamily="34" charset="0"/>
-            </a:endParaRPr>
-          </a:p>
-          <a:p>
-            <a:endParaRPr lang="en-US" sz="3600" b="1" dirty="0">
-              <a:latin typeface="Calibri" panose="020F0502020204030204" pitchFamily="34" charset="0"/>
-              <a:ea typeface="Calibri" panose="020F0502020204030204" pitchFamily="34" charset="0"/>
-              <a:cs typeface="Calibri" panose="020F0502020204030204" pitchFamily="34" charset="0"/>
-            </a:endParaRPr>
-          </a:p>
-          <a:p>
-            <a:endParaRPr lang="en-US" sz="2800" dirty="0"/>
-          </a:p>
-          <a:p>
-            <a:endParaRPr lang="en-US" sz="2800" dirty="0"/>
+              <a:t>8.Interactive Dashboard</a:t>
+            </a:r>
           </a:p>
         </p:txBody>
       </p:sp>
@@ -33599,7 +34126,7 @@
           <p:cNvPr id="4" name="Picture 3">
             <a:extLst>
               <a:ext uri="{FF2B5EF4-FFF2-40B4-BE49-F238E27FC236}">
-                <a16:creationId xmlns:a16="http://schemas.microsoft.com/office/drawing/2014/main" id="{5644CB23-84F1-0EC6-90F2-2AEF33EED008}"/>
+                <a16:creationId xmlns:a16="http://schemas.microsoft.com/office/drawing/2014/main" id="{4D5ED09D-BDAA-0E2A-EB06-352B2ED7C185}"/>
               </a:ext>
             </a:extLst>
           </p:cNvPr>
@@ -33621,7 +34148,7 @@
         </p:blipFill>
         <p:spPr>
           <a:xfrm>
-            <a:off x="462093" y="1673453"/>
+            <a:off x="457096" y="3140958"/>
             <a:ext cx="2801816" cy="857579"/>
           </a:xfrm>
           <a:prstGeom prst="rect">
@@ -33632,17 +34159,513 @@
     </p:spTree>
     <p:extLst>
       <p:ext uri="{BB962C8B-B14F-4D97-AF65-F5344CB8AC3E}">
-        <p14:creationId xmlns:p14="http://schemas.microsoft.com/office/powerpoint/2010/main" val="4125307019"/>
+        <p14:creationId xmlns:p14="http://schemas.microsoft.com/office/powerpoint/2010/main" val="2813752193"/>
       </p:ext>
     </p:extLst>
   </p:cSld>
   <p:clrMapOvr>
     <a:masterClrMapping/>
   </p:clrMapOvr>
+  <mc:AlternateContent xmlns:mc="http://schemas.openxmlformats.org/markup-compatibility/2006">
+    <mc:Choice xmlns:p14="http://schemas.microsoft.com/office/powerpoint/2010/main" Requires="p14">
+      <p:transition spd="med" p14:dur="700">
+        <p:fade/>
+      </p:transition>
+    </mc:Choice>
+    <mc:Fallback>
+      <p:transition spd="med">
+        <p:fade/>
+      </p:transition>
+    </mc:Fallback>
+  </mc:AlternateContent>
 </p:sld>
 </file>
 
 <file path=ppt/slides/slide45.xml><?xml version="1.0" encoding="utf-8"?>
+<p:sld xmlns:a="http://schemas.openxmlformats.org/drawingml/2006/main" xmlns:r="http://schemas.openxmlformats.org/officeDocument/2006/relationships" xmlns:p="http://schemas.openxmlformats.org/presentationml/2006/main" showMasterSp="0">
+  <p:cSld>
+    <p:spTree>
+      <p:nvGrpSpPr>
+        <p:cNvPr id="1" name="">
+          <a:extLst>
+            <a:ext uri="{FF2B5EF4-FFF2-40B4-BE49-F238E27FC236}">
+              <a16:creationId xmlns:a16="http://schemas.microsoft.com/office/drawing/2014/main" id="{F59F9CFF-E66F-CAB1-D315-FD78625C522C}"/>
+            </a:ext>
+          </a:extLst>
+        </p:cNvPr>
+        <p:cNvGrpSpPr/>
+        <p:nvPr/>
+      </p:nvGrpSpPr>
+      <p:grpSpPr>
+        <a:xfrm>
+          <a:off x="0" y="0"/>
+          <a:ext cx="0" cy="0"/>
+          <a:chOff x="0" y="0"/>
+          <a:chExt cx="0" cy="0"/>
+        </a:xfrm>
+      </p:grpSpPr>
+      <p:sp>
+        <p:nvSpPr>
+          <p:cNvPr id="2" name="Title 1">
+            <a:extLst>
+              <a:ext uri="{FF2B5EF4-FFF2-40B4-BE49-F238E27FC236}">
+                <a16:creationId xmlns:a16="http://schemas.microsoft.com/office/drawing/2014/main" id="{A4F18A2F-6055-7FA0-CAEF-847CECF667EB}"/>
+              </a:ext>
+            </a:extLst>
+          </p:cNvPr>
+          <p:cNvSpPr>
+            <a:spLocks noGrp="1"/>
+          </p:cNvSpPr>
+          <p:nvPr>
+            <p:ph type="title"/>
+          </p:nvPr>
+        </p:nvSpPr>
+        <p:spPr>
+          <a:xfrm>
+            <a:off x="258618" y="-189353"/>
+            <a:ext cx="10170974" cy="1325563"/>
+          </a:xfrm>
+        </p:spPr>
+        <p:txBody>
+          <a:bodyPr>
+            <a:normAutofit/>
+          </a:bodyPr>
+          <a:lstStyle/>
+          <a:p>
+            <a:pPr algn="l"/>
+            <a:r>
+              <a:rPr lang="en-US" dirty="0">
+                <a:latin typeface="Calibri" panose="020F0502020204030204" pitchFamily="34" charset="0"/>
+                <a:ea typeface="Calibri" panose="020F0502020204030204" pitchFamily="34" charset="0"/>
+                <a:cs typeface="Calibri" panose="020F0502020204030204" pitchFamily="34" charset="0"/>
+              </a:rPr>
+              <a:t>Recommendations based on Risk Level</a:t>
+            </a:r>
+          </a:p>
+        </p:txBody>
+      </p:sp>
+      <p:sp>
+        <p:nvSpPr>
+          <p:cNvPr id="9" name="TextBox 8">
+            <a:extLst>
+              <a:ext uri="{FF2B5EF4-FFF2-40B4-BE49-F238E27FC236}">
+                <a16:creationId xmlns:a16="http://schemas.microsoft.com/office/drawing/2014/main" id="{29735E1A-BFE4-D049-B4FF-48BC6CDD972C}"/>
+              </a:ext>
+            </a:extLst>
+          </p:cNvPr>
+          <p:cNvSpPr txBox="1"/>
+          <p:nvPr/>
+        </p:nvSpPr>
+        <p:spPr>
+          <a:xfrm>
+            <a:off x="3272878" y="1074509"/>
+            <a:ext cx="6275856" cy="5016758"/>
+          </a:xfrm>
+          <a:prstGeom prst="rect">
+            <a:avLst/>
+          </a:prstGeom>
+          <a:noFill/>
+        </p:spPr>
+        <p:txBody>
+          <a:bodyPr wrap="square">
+            <a:spAutoFit/>
+          </a:bodyPr>
+          <a:lstStyle/>
+          <a:p>
+            <a:r>
+              <a:rPr lang="en-IE" sz="2000" b="1" dirty="0">
+                <a:solidFill>
+                  <a:srgbClr val="0070BA"/>
+                </a:solidFill>
+                <a:latin typeface="Calibri" panose="020F0502020204030204" pitchFamily="34" charset="0"/>
+                <a:ea typeface="Calibri" panose="020F0502020204030204" pitchFamily="34" charset="0"/>
+                <a:cs typeface="Calibri" panose="020F0502020204030204" pitchFamily="34" charset="0"/>
+              </a:rPr>
+              <a:t>Critical Risk Actions:</a:t>
+            </a:r>
+            <a:br>
+              <a:rPr lang="en-IE" sz="2000" dirty="0">
+                <a:latin typeface="Calibri" panose="020F0502020204030204" pitchFamily="34" charset="0"/>
+                <a:ea typeface="Calibri" panose="020F0502020204030204" pitchFamily="34" charset="0"/>
+                <a:cs typeface="Calibri" panose="020F0502020204030204" pitchFamily="34" charset="0"/>
+              </a:rPr>
+            </a:br>
+            <a:r>
+              <a:rPr lang="en-US" sz="2000" dirty="0">
+                <a:latin typeface="Calibri" panose="020F0502020204030204" pitchFamily="34" charset="0"/>
+                <a:ea typeface="Calibri" panose="020F0502020204030204" pitchFamily="34" charset="0"/>
+                <a:cs typeface="Calibri" panose="020F0502020204030204" pitchFamily="34" charset="0"/>
+              </a:rPr>
+              <a:t>• Enforce delivery confirmation (photo + PIN +Verification)</a:t>
+            </a:r>
+          </a:p>
+          <a:p>
+            <a:r>
+              <a:rPr lang="en-US" sz="2000" dirty="0">
+                <a:latin typeface="Calibri" panose="020F0502020204030204" pitchFamily="34" charset="0"/>
+                <a:ea typeface="Calibri" panose="020F0502020204030204" pitchFamily="34" charset="0"/>
+                <a:cs typeface="Calibri" panose="020F0502020204030204" pitchFamily="34" charset="0"/>
+              </a:rPr>
+              <a:t>• Use tamper-proof packaging </a:t>
+            </a:r>
+            <a:r>
+              <a:rPr lang="en-IE" sz="2000" dirty="0">
+                <a:latin typeface="Calibri" panose="020F0502020204030204" pitchFamily="34" charset="0"/>
+                <a:ea typeface="Calibri" panose="020F0502020204030204" pitchFamily="34" charset="0"/>
+                <a:cs typeface="Calibri" panose="020F0502020204030204" pitchFamily="34" charset="0"/>
+              </a:rPr>
+              <a:t>for high-value items</a:t>
+            </a:r>
+            <a:br>
+              <a:rPr lang="en-IE" sz="2000" dirty="0">
+                <a:latin typeface="Calibri" panose="020F0502020204030204" pitchFamily="34" charset="0"/>
+                <a:ea typeface="Calibri" panose="020F0502020204030204" pitchFamily="34" charset="0"/>
+                <a:cs typeface="Calibri" panose="020F0502020204030204" pitchFamily="34" charset="0"/>
+              </a:rPr>
+            </a:br>
+            <a:r>
+              <a:rPr lang="en-US" sz="2000" dirty="0">
+                <a:latin typeface="Calibri" panose="020F0502020204030204" pitchFamily="34" charset="0"/>
+                <a:ea typeface="Calibri" panose="020F0502020204030204" pitchFamily="34" charset="0"/>
+                <a:cs typeface="Calibri" panose="020F0502020204030204" pitchFamily="34" charset="0"/>
+              </a:rPr>
+              <a:t>• Flag multiple drivers ID accounts</a:t>
+            </a:r>
+          </a:p>
+          <a:p>
+            <a:r>
+              <a:rPr lang="en-US" sz="2000" dirty="0">
+                <a:latin typeface="Calibri" panose="020F0502020204030204" pitchFamily="34" charset="0"/>
+                <a:ea typeface="Calibri" panose="020F0502020204030204" pitchFamily="34" charset="0"/>
+                <a:cs typeface="Calibri" panose="020F0502020204030204" pitchFamily="34" charset="0"/>
+              </a:rPr>
+              <a:t>• Track high-risk segments in real time</a:t>
+            </a:r>
+          </a:p>
+          <a:p>
+            <a:br>
+              <a:rPr lang="en-IE" sz="2000" dirty="0">
+                <a:latin typeface="Calibri" panose="020F0502020204030204" pitchFamily="34" charset="0"/>
+                <a:ea typeface="Calibri" panose="020F0502020204030204" pitchFamily="34" charset="0"/>
+                <a:cs typeface="Calibri" panose="020F0502020204030204" pitchFamily="34" charset="0"/>
+              </a:rPr>
+            </a:br>
+            <a:r>
+              <a:rPr lang="en-IE" sz="2000" b="1" dirty="0">
+                <a:solidFill>
+                  <a:srgbClr val="0070BA"/>
+                </a:solidFill>
+                <a:latin typeface="Calibri" panose="020F0502020204030204" pitchFamily="34" charset="0"/>
+                <a:ea typeface="Calibri" panose="020F0502020204030204" pitchFamily="34" charset="0"/>
+                <a:cs typeface="Calibri" panose="020F0502020204030204" pitchFamily="34" charset="0"/>
+              </a:rPr>
+              <a:t>High Risk Actions:</a:t>
+            </a:r>
+            <a:br>
+              <a:rPr lang="en-IE" sz="2000" dirty="0">
+                <a:latin typeface="Calibri" panose="020F0502020204030204" pitchFamily="34" charset="0"/>
+                <a:ea typeface="Calibri" panose="020F0502020204030204" pitchFamily="34" charset="0"/>
+                <a:cs typeface="Calibri" panose="020F0502020204030204" pitchFamily="34" charset="0"/>
+              </a:rPr>
+            </a:br>
+            <a:r>
+              <a:rPr lang="en-US" sz="2000" dirty="0">
+                <a:latin typeface="Calibri" panose="020F0502020204030204" pitchFamily="34" charset="0"/>
+                <a:ea typeface="Calibri" panose="020F0502020204030204" pitchFamily="34" charset="0"/>
+                <a:cs typeface="Calibri" panose="020F0502020204030204" pitchFamily="34" charset="0"/>
+              </a:rPr>
+              <a:t>• Add picking validation</a:t>
+            </a:r>
+            <a:br>
+              <a:rPr lang="en-IE" sz="2000" dirty="0">
+                <a:latin typeface="Calibri" panose="020F0502020204030204" pitchFamily="34" charset="0"/>
+                <a:ea typeface="Calibri" panose="020F0502020204030204" pitchFamily="34" charset="0"/>
+                <a:cs typeface="Calibri" panose="020F0502020204030204" pitchFamily="34" charset="0"/>
+              </a:rPr>
+            </a:br>
+            <a:r>
+              <a:rPr lang="en-US" sz="2000" dirty="0">
+                <a:latin typeface="Calibri" panose="020F0502020204030204" pitchFamily="34" charset="0"/>
+                <a:ea typeface="Calibri" panose="020F0502020204030204" pitchFamily="34" charset="0"/>
+                <a:cs typeface="Calibri" panose="020F0502020204030204" pitchFamily="34" charset="0"/>
+              </a:rPr>
+              <a:t>• User automated order checks</a:t>
+            </a:r>
+            <a:br>
+              <a:rPr lang="en-IE" sz="2000" dirty="0">
+                <a:latin typeface="Calibri" panose="020F0502020204030204" pitchFamily="34" charset="0"/>
+                <a:ea typeface="Calibri" panose="020F0502020204030204" pitchFamily="34" charset="0"/>
+                <a:cs typeface="Calibri" panose="020F0502020204030204" pitchFamily="34" charset="0"/>
+              </a:rPr>
+            </a:br>
+            <a:br>
+              <a:rPr lang="en-IE" sz="2000" dirty="0">
+                <a:latin typeface="Calibri" panose="020F0502020204030204" pitchFamily="34" charset="0"/>
+                <a:ea typeface="Calibri" panose="020F0502020204030204" pitchFamily="34" charset="0"/>
+                <a:cs typeface="Calibri" panose="020F0502020204030204" pitchFamily="34" charset="0"/>
+              </a:rPr>
+            </a:br>
+            <a:r>
+              <a:rPr lang="en-IE" sz="2000" b="1" dirty="0">
+                <a:solidFill>
+                  <a:srgbClr val="0070BA"/>
+                </a:solidFill>
+                <a:latin typeface="Calibri" panose="020F0502020204030204" pitchFamily="34" charset="0"/>
+                <a:ea typeface="Calibri" panose="020F0502020204030204" pitchFamily="34" charset="0"/>
+                <a:cs typeface="Calibri" panose="020F0502020204030204" pitchFamily="34" charset="0"/>
+              </a:rPr>
+              <a:t>Moderate Risk Actions:</a:t>
+            </a:r>
+            <a:br>
+              <a:rPr lang="en-IE" sz="2000" dirty="0">
+                <a:latin typeface="Calibri" panose="020F0502020204030204" pitchFamily="34" charset="0"/>
+                <a:ea typeface="Calibri" panose="020F0502020204030204" pitchFamily="34" charset="0"/>
+                <a:cs typeface="Calibri" panose="020F0502020204030204" pitchFamily="34" charset="0"/>
+              </a:rPr>
+            </a:br>
+            <a:r>
+              <a:rPr lang="en-US" sz="2000" dirty="0">
+                <a:latin typeface="Calibri" panose="020F0502020204030204" pitchFamily="34" charset="0"/>
+                <a:ea typeface="Calibri" panose="020F0502020204030204" pitchFamily="34" charset="0"/>
+                <a:cs typeface="Calibri" panose="020F0502020204030204" pitchFamily="34" charset="0"/>
+              </a:rPr>
+              <a:t>•</a:t>
+            </a:r>
+            <a:r>
+              <a:rPr lang="en-IE" sz="2000" dirty="0">
+                <a:latin typeface="Calibri" panose="020F0502020204030204" pitchFamily="34" charset="0"/>
+                <a:ea typeface="Calibri" panose="020F0502020204030204" pitchFamily="34" charset="0"/>
+                <a:cs typeface="Calibri" panose="020F0502020204030204" pitchFamily="34" charset="0"/>
+              </a:rPr>
+              <a:t> Standard monitoring</a:t>
+            </a:r>
+            <a:br>
+              <a:rPr lang="en-IE" sz="2000" dirty="0">
+                <a:latin typeface="Calibri" panose="020F0502020204030204" pitchFamily="34" charset="0"/>
+                <a:ea typeface="Calibri" panose="020F0502020204030204" pitchFamily="34" charset="0"/>
+                <a:cs typeface="Calibri" panose="020F0502020204030204" pitchFamily="34" charset="0"/>
+              </a:rPr>
+            </a:br>
+            <a:r>
+              <a:rPr lang="en-US" sz="2000" dirty="0">
+                <a:latin typeface="Calibri" panose="020F0502020204030204" pitchFamily="34" charset="0"/>
+                <a:ea typeface="Calibri" panose="020F0502020204030204" pitchFamily="34" charset="0"/>
+                <a:cs typeface="Calibri" panose="020F0502020204030204" pitchFamily="34" charset="0"/>
+              </a:rPr>
+              <a:t>• </a:t>
+            </a:r>
+            <a:r>
+              <a:rPr lang="en-IE" sz="2000" dirty="0">
+                <a:latin typeface="Calibri" panose="020F0502020204030204" pitchFamily="34" charset="0"/>
+                <a:ea typeface="Calibri" panose="020F0502020204030204" pitchFamily="34" charset="0"/>
+                <a:cs typeface="Calibri" panose="020F0502020204030204" pitchFamily="34" charset="0"/>
+              </a:rPr>
+              <a:t>Track for pattern escalation</a:t>
+            </a:r>
+            <a:br>
+              <a:rPr lang="en-IE" sz="2000" dirty="0">
+                <a:latin typeface="Calibri" panose="020F0502020204030204" pitchFamily="34" charset="0"/>
+                <a:ea typeface="Calibri" panose="020F0502020204030204" pitchFamily="34" charset="0"/>
+                <a:cs typeface="Calibri" panose="020F0502020204030204" pitchFamily="34" charset="0"/>
+              </a:rPr>
+            </a:br>
+            <a:br>
+              <a:rPr lang="en-IE" sz="2000" dirty="0">
+                <a:latin typeface="Calibri" panose="020F0502020204030204" pitchFamily="34" charset="0"/>
+                <a:ea typeface="Calibri" panose="020F0502020204030204" pitchFamily="34" charset="0"/>
+                <a:cs typeface="Calibri" panose="020F0502020204030204" pitchFamily="34" charset="0"/>
+              </a:rPr>
+            </a:br>
+            <a:r>
+              <a:rPr lang="en-IE" sz="2000" b="1" dirty="0">
+                <a:solidFill>
+                  <a:srgbClr val="0070BA"/>
+                </a:solidFill>
+                <a:latin typeface="Calibri" panose="020F0502020204030204" pitchFamily="34" charset="0"/>
+                <a:ea typeface="Calibri" panose="020F0502020204030204" pitchFamily="34" charset="0"/>
+                <a:cs typeface="Calibri" panose="020F0502020204030204" pitchFamily="34" charset="0"/>
+              </a:rPr>
+              <a:t>Low Risk Actions:</a:t>
+            </a:r>
+            <a:br>
+              <a:rPr lang="en-IE" sz="2000" dirty="0">
+                <a:latin typeface="Calibri" panose="020F0502020204030204" pitchFamily="34" charset="0"/>
+                <a:ea typeface="Calibri" panose="020F0502020204030204" pitchFamily="34" charset="0"/>
+                <a:cs typeface="Calibri" panose="020F0502020204030204" pitchFamily="34" charset="0"/>
+              </a:rPr>
+            </a:br>
+            <a:r>
+              <a:rPr lang="en-US" sz="2000" dirty="0">
+                <a:latin typeface="Calibri" panose="020F0502020204030204" pitchFamily="34" charset="0"/>
+                <a:ea typeface="Calibri" panose="020F0502020204030204" pitchFamily="34" charset="0"/>
+                <a:cs typeface="Calibri" panose="020F0502020204030204" pitchFamily="34" charset="0"/>
+              </a:rPr>
+              <a:t>• </a:t>
+            </a:r>
+            <a:r>
+              <a:rPr lang="en-IE" sz="2000" dirty="0">
+                <a:latin typeface="Calibri" panose="020F0502020204030204" pitchFamily="34" charset="0"/>
+                <a:ea typeface="Calibri" panose="020F0502020204030204" pitchFamily="34" charset="0"/>
+                <a:cs typeface="Calibri" panose="020F0502020204030204" pitchFamily="34" charset="0"/>
+              </a:rPr>
+              <a:t>No immediate action required</a:t>
+            </a:r>
+            <a:endParaRPr lang="en-US" sz="2000" dirty="0">
+              <a:latin typeface="Calibri" panose="020F0502020204030204" pitchFamily="34" charset="0"/>
+              <a:ea typeface="Calibri" panose="020F0502020204030204" pitchFamily="34" charset="0"/>
+              <a:cs typeface="Calibri" panose="020F0502020204030204" pitchFamily="34" charset="0"/>
+            </a:endParaRPr>
+          </a:p>
+        </p:txBody>
+      </p:sp>
+    </p:spTree>
+    <p:extLst>
+      <p:ext uri="{BB962C8B-B14F-4D97-AF65-F5344CB8AC3E}">
+        <p14:creationId xmlns:p14="http://schemas.microsoft.com/office/powerpoint/2010/main" val="1936848131"/>
+      </p:ext>
+    </p:extLst>
+  </p:cSld>
+  <p:clrMapOvr>
+    <a:masterClrMapping/>
+  </p:clrMapOvr>
+  <mc:AlternateContent xmlns:mc="http://schemas.openxmlformats.org/markup-compatibility/2006">
+    <mc:Choice xmlns:p14="http://schemas.microsoft.com/office/powerpoint/2010/main" Requires="p14">
+      <p:transition spd="med" p14:dur="700">
+        <p:fade/>
+      </p:transition>
+    </mc:Choice>
+    <mc:Fallback>
+      <p:transition spd="med">
+        <p:fade/>
+      </p:transition>
+    </mc:Fallback>
+  </mc:AlternateContent>
+</p:sld>
+</file>
+
+<file path=ppt/slides/slide46.xml><?xml version="1.0" encoding="utf-8"?>
+<p:sld xmlns:a="http://schemas.openxmlformats.org/drawingml/2006/main" xmlns:r="http://schemas.openxmlformats.org/officeDocument/2006/relationships" xmlns:p="http://schemas.openxmlformats.org/presentationml/2006/main" showMasterSp="0">
+  <p:cSld>
+    <p:spTree>
+      <p:nvGrpSpPr>
+        <p:cNvPr id="1" name="">
+          <a:extLst>
+            <a:ext uri="{FF2B5EF4-FFF2-40B4-BE49-F238E27FC236}">
+              <a16:creationId xmlns:a16="http://schemas.microsoft.com/office/drawing/2014/main" id="{7618B152-DF26-E210-A5E2-23EF9BD3E691}"/>
+            </a:ext>
+          </a:extLst>
+        </p:cNvPr>
+        <p:cNvGrpSpPr/>
+        <p:nvPr/>
+      </p:nvGrpSpPr>
+      <p:grpSpPr>
+        <a:xfrm>
+          <a:off x="0" y="0"/>
+          <a:ext cx="0" cy="0"/>
+          <a:chOff x="0" y="0"/>
+          <a:chExt cx="0" cy="0"/>
+        </a:xfrm>
+      </p:grpSpPr>
+      <p:sp>
+        <p:nvSpPr>
+          <p:cNvPr id="2" name="Title 1">
+            <a:extLst>
+              <a:ext uri="{FF2B5EF4-FFF2-40B4-BE49-F238E27FC236}">
+                <a16:creationId xmlns:a16="http://schemas.microsoft.com/office/drawing/2014/main" id="{533F30E3-FB47-0259-3C94-832BC0B283C6}"/>
+              </a:ext>
+            </a:extLst>
+          </p:cNvPr>
+          <p:cNvSpPr>
+            <a:spLocks noGrp="1"/>
+          </p:cNvSpPr>
+          <p:nvPr>
+            <p:ph type="title"/>
+          </p:nvPr>
+        </p:nvSpPr>
+        <p:spPr>
+          <a:xfrm>
+            <a:off x="457096" y="3998537"/>
+            <a:ext cx="9288489" cy="1186010"/>
+          </a:xfrm>
+        </p:spPr>
+        <p:txBody>
+          <a:bodyPr>
+            <a:normAutofit/>
+          </a:bodyPr>
+          <a:lstStyle/>
+          <a:p>
+            <a:r>
+              <a:rPr lang="en-GB" sz="6000" dirty="0">
+                <a:latin typeface="Calibri" panose="020F0502020204030204" pitchFamily="34" charset="0"/>
+                <a:ea typeface="Calibri" panose="020F0502020204030204" pitchFamily="34" charset="0"/>
+                <a:cs typeface="Calibri" panose="020F0502020204030204" pitchFamily="34" charset="0"/>
+              </a:rPr>
+              <a:t>Thank You</a:t>
+            </a:r>
+          </a:p>
+        </p:txBody>
+      </p:sp>
+      <p:pic>
+        <p:nvPicPr>
+          <p:cNvPr id="4" name="Picture 3">
+            <a:extLst>
+              <a:ext uri="{FF2B5EF4-FFF2-40B4-BE49-F238E27FC236}">
+                <a16:creationId xmlns:a16="http://schemas.microsoft.com/office/drawing/2014/main" id="{E69DDF42-D5BE-012B-8E08-71E3D8B92772}"/>
+              </a:ext>
+            </a:extLst>
+          </p:cNvPr>
+          <p:cNvPicPr>
+            <a:picLocks noChangeAspect="1"/>
+          </p:cNvPicPr>
+          <p:nvPr/>
+        </p:nvPicPr>
+        <p:blipFill rotWithShape="1">
+          <a:blip r:embed="rId2">
+            <a:extLst>
+              <a:ext uri="{28A0092B-C50C-407E-A947-70E740481C1C}">
+                <a14:useLocalDpi xmlns:a14="http://schemas.microsoft.com/office/drawing/2010/main" val="0"/>
+              </a:ext>
+            </a:extLst>
+          </a:blip>
+          <a:srcRect l="22155" t="29129" r="22807" b="40923"/>
+          <a:stretch/>
+        </p:blipFill>
+        <p:spPr>
+          <a:xfrm>
+            <a:off x="457096" y="3140958"/>
+            <a:ext cx="2801816" cy="857579"/>
+          </a:xfrm>
+          <a:prstGeom prst="rect">
+            <a:avLst/>
+          </a:prstGeom>
+        </p:spPr>
+      </p:pic>
+    </p:spTree>
+    <p:extLst>
+      <p:ext uri="{BB962C8B-B14F-4D97-AF65-F5344CB8AC3E}">
+        <p14:creationId xmlns:p14="http://schemas.microsoft.com/office/powerpoint/2010/main" val="3105293600"/>
+      </p:ext>
+    </p:extLst>
+  </p:cSld>
+  <p:clrMapOvr>
+    <a:masterClrMapping/>
+  </p:clrMapOvr>
+  <mc:AlternateContent xmlns:mc="http://schemas.openxmlformats.org/markup-compatibility/2006">
+    <mc:Choice xmlns:p14="http://schemas.microsoft.com/office/powerpoint/2010/main" Requires="p14">
+      <p:transition spd="med" p14:dur="700">
+        <p:fade/>
+      </p:transition>
+    </mc:Choice>
+    <mc:Fallback>
+      <p:transition spd="med">
+        <p:fade/>
+      </p:transition>
+    </mc:Fallback>
+  </mc:AlternateContent>
+</p:sld>
+</file>
+
+<file path=ppt/slides/slide47.xml><?xml version="1.0" encoding="utf-8"?>
 <p:sld xmlns:a="http://schemas.openxmlformats.org/drawingml/2006/main" xmlns:r="http://schemas.openxmlformats.org/officeDocument/2006/relationships" xmlns:p="http://schemas.openxmlformats.org/presentationml/2006/main" showMasterSp="0">
   <p:cSld>
     <p:spTree>
@@ -33927,6 +34950,18 @@
   <p:clrMapOvr>
     <a:masterClrMapping/>
   </p:clrMapOvr>
+  <mc:AlternateContent xmlns:mc="http://schemas.openxmlformats.org/markup-compatibility/2006">
+    <mc:Choice xmlns:p14="http://schemas.microsoft.com/office/powerpoint/2010/main" Requires="p14">
+      <p:transition spd="med" p14:dur="700">
+        <p:fade/>
+      </p:transition>
+    </mc:Choice>
+    <mc:Fallback>
+      <p:transition spd="med">
+        <p:fade/>
+      </p:transition>
+    </mc:Fallback>
+  </mc:AlternateContent>
 </p:sld>
 </file>
 
@@ -35678,6 +36713,18 @@
   <p:clrMapOvr>
     <a:masterClrMapping/>
   </p:clrMapOvr>
+  <mc:AlternateContent xmlns:mc="http://schemas.openxmlformats.org/markup-compatibility/2006">
+    <mc:Choice xmlns:p14="http://schemas.microsoft.com/office/powerpoint/2010/main" Requires="p14">
+      <p:transition spd="med" p14:dur="700">
+        <p:fade/>
+      </p:transition>
+    </mc:Choice>
+    <mc:Fallback>
+      <p:transition spd="med">
+        <p:fade/>
+      </p:transition>
+    </mc:Fallback>
+  </mc:AlternateContent>
 </p:sld>
 </file>
 
@@ -35956,6 +37003,18 @@
   <p:clrMapOvr>
     <a:masterClrMapping/>
   </p:clrMapOvr>
+  <mc:AlternateContent xmlns:mc="http://schemas.openxmlformats.org/markup-compatibility/2006">
+    <mc:Choice xmlns:p14="http://schemas.microsoft.com/office/powerpoint/2010/main" Requires="p14">
+      <p:transition spd="med" p14:dur="700">
+        <p:fade/>
+      </p:transition>
+    </mc:Choice>
+    <mc:Fallback>
+      <p:transition spd="med">
+        <p:fade/>
+      </p:transition>
+    </mc:Fallback>
+  </mc:AlternateContent>
 </p:sld>
 </file>
 
@@ -36224,6 +37283,18 @@
   <p:clrMapOvr>
     <a:masterClrMapping/>
   </p:clrMapOvr>
+  <mc:AlternateContent xmlns:mc="http://schemas.openxmlformats.org/markup-compatibility/2006">
+    <mc:Choice xmlns:p14="http://schemas.microsoft.com/office/powerpoint/2010/main" Requires="p14">
+      <p:transition spd="med" p14:dur="700">
+        <p:fade/>
+      </p:transition>
+    </mc:Choice>
+    <mc:Fallback>
+      <p:transition spd="med">
+        <p:fade/>
+      </p:transition>
+    </mc:Fallback>
+  </mc:AlternateContent>
 </p:sld>
 </file>
 
@@ -36508,6 +37579,18 @@
   <p:clrMapOvr>
     <a:masterClrMapping/>
   </p:clrMapOvr>
+  <mc:AlternateContent xmlns:mc="http://schemas.openxmlformats.org/markup-compatibility/2006">
+    <mc:Choice xmlns:p14="http://schemas.microsoft.com/office/powerpoint/2010/main" Requires="p14">
+      <p:transition spd="med" p14:dur="700">
+        <p:fade/>
+      </p:transition>
+    </mc:Choice>
+    <mc:Fallback>
+      <p:transition spd="med">
+        <p:fade/>
+      </p:transition>
+    </mc:Fallback>
+  </mc:AlternateContent>
 </p:sld>
 </file>
 
@@ -37543,6 +38626,18 @@
   <p:clrMapOvr>
     <a:masterClrMapping/>
   </p:clrMapOvr>
+  <mc:AlternateContent xmlns:mc="http://schemas.openxmlformats.org/markup-compatibility/2006">
+    <mc:Choice xmlns:p14="http://schemas.microsoft.com/office/powerpoint/2010/main" Requires="p14">
+      <p:transition spd="med" p14:dur="700">
+        <p:fade/>
+      </p:transition>
+    </mc:Choice>
+    <mc:Fallback>
+      <p:transition spd="med">
+        <p:fade/>
+      </p:transition>
+    </mc:Fallback>
+  </mc:AlternateContent>
 </p:sld>
 </file>
 

--- a/presentation/Walmart - Fraud Risk Analysis in Delivery Operations.pptx
+++ b/presentation/Walmart - Fraud Risk Analysis in Delivery Operations.pptx
@@ -246,7 +246,7 @@
           <a:p>
             <a:fld id="{7692F8F4-3A56-45F7-A40D-BD33D53E9BFB}" type="datetimeFigureOut">
               <a:rPr lang="en-IE" smtClean="0"/>
-              <a:t>20/03/2026</a:t>
+              <a:t>21/03/2026</a:t>
             </a:fld>
             <a:endParaRPr lang="en-IE"/>
           </a:p>
@@ -674,7 +674,7 @@
           <a:p>
             <a:fld id="{276D79ED-3FA7-4EF8-964B-EB8BCFAB02F8}" type="datetimeFigureOut">
               <a:rPr lang="en-US" smtClean="0"/>
-              <a:t>3/20/2026</a:t>
+              <a:t>3/21/2026</a:t>
             </a:fld>
             <a:endParaRPr lang="en-US"/>
           </a:p>
@@ -874,7 +874,7 @@
             <a:fld id="{276D79ED-3FA7-4EF8-964B-EB8BCFAB02F8}" type="datetimeFigureOut">
               <a:rPr lang="en-US" smtClean="0"/>
               <a:pPr/>
-              <a:t>3/20/2026</a:t>
+              <a:t>3/21/2026</a:t>
             </a:fld>
             <a:endParaRPr lang="en-US"/>
           </a:p>
@@ -1227,7 +1227,7 @@
           <a:p>
             <a:fld id="{276D79ED-3FA7-4EF8-964B-EB8BCFAB02F8}" type="datetimeFigureOut">
               <a:rPr lang="en-US" smtClean="0"/>
-              <a:t>3/20/2026</a:t>
+              <a:t>3/21/2026</a:t>
             </a:fld>
             <a:endParaRPr lang="en-US"/>
           </a:p>
@@ -1468,7 +1468,7 @@
           <a:p>
             <a:fld id="{276D79ED-3FA7-4EF8-964B-EB8BCFAB02F8}" type="datetimeFigureOut">
               <a:rPr lang="en-US" smtClean="0"/>
-              <a:t>3/20/2026</a:t>
+              <a:t>3/21/2026</a:t>
             </a:fld>
             <a:endParaRPr lang="en-US"/>
           </a:p>
@@ -1832,7 +1832,7 @@
           <a:p>
             <a:fld id="{276D79ED-3FA7-4EF8-964B-EB8BCFAB02F8}" type="datetimeFigureOut">
               <a:rPr lang="en-US" smtClean="0"/>
-              <a:t>3/20/2026</a:t>
+              <a:t>3/21/2026</a:t>
             </a:fld>
             <a:endParaRPr lang="en-US"/>
           </a:p>
@@ -1949,7 +1949,7 @@
           <a:p>
             <a:fld id="{276D79ED-3FA7-4EF8-964B-EB8BCFAB02F8}" type="datetimeFigureOut">
               <a:rPr lang="en-US" smtClean="0"/>
-              <a:t>3/20/2026</a:t>
+              <a:t>3/21/2026</a:t>
             </a:fld>
             <a:endParaRPr lang="en-US"/>
           </a:p>
@@ -2044,7 +2044,7 @@
           <a:p>
             <a:fld id="{276D79ED-3FA7-4EF8-964B-EB8BCFAB02F8}" type="datetimeFigureOut">
               <a:rPr lang="en-US" smtClean="0"/>
-              <a:t>3/20/2026</a:t>
+              <a:t>3/21/2026</a:t>
             </a:fld>
             <a:endParaRPr lang="en-US"/>
           </a:p>
@@ -2266,7 +2266,7 @@
             <a:fld id="{276D79ED-3FA7-4EF8-964B-EB8BCFAB02F8}" type="datetimeFigureOut">
               <a:rPr lang="en-US" smtClean="0"/>
               <a:pPr/>
-              <a:t>3/20/2026</a:t>
+              <a:t>3/21/2026</a:t>
             </a:fld>
             <a:endParaRPr lang="en-US"/>
           </a:p>
@@ -3165,13 +3165,13 @@
   <p:clrMapOvr>
     <a:masterClrMapping/>
   </p:clrMapOvr>
-  <mc:AlternateContent xmlns:mc="http://schemas.openxmlformats.org/markup-compatibility/2006">
-    <mc:Choice xmlns:p14="http://schemas.microsoft.com/office/powerpoint/2010/main" Requires="p14">
+  <mc:AlternateContent xmlns:mc="http://schemas.openxmlformats.org/markup-compatibility/2006" xmlns:p14="http://schemas.microsoft.com/office/powerpoint/2010/main">
+    <mc:Choice Requires="p14">
       <p:transition spd="med" p14:dur="700">
         <p:fade/>
       </p:transition>
     </mc:Choice>
-    <mc:Fallback>
+    <mc:Fallback xmlns="">
       <p:transition spd="med">
         <p:fade/>
       </p:transition>
@@ -3302,13 +3302,13 @@
   <p:clrMapOvr>
     <a:masterClrMapping/>
   </p:clrMapOvr>
-  <mc:AlternateContent xmlns:mc="http://schemas.openxmlformats.org/markup-compatibility/2006">
-    <mc:Choice xmlns:p14="http://schemas.microsoft.com/office/powerpoint/2010/main" Requires="p14">
+  <mc:AlternateContent xmlns:mc="http://schemas.openxmlformats.org/markup-compatibility/2006" xmlns:p14="http://schemas.microsoft.com/office/powerpoint/2010/main">
+    <mc:Choice Requires="p14">
       <p:transition spd="med" p14:dur="700">
         <p:fade/>
       </p:transition>
     </mc:Choice>
-    <mc:Fallback>
+    <mc:Fallback xmlns="">
       <p:transition spd="med">
         <p:fade/>
       </p:transition>
@@ -4243,13 +4243,13 @@
   <p:clrMapOvr>
     <a:masterClrMapping/>
   </p:clrMapOvr>
-  <mc:AlternateContent xmlns:mc="http://schemas.openxmlformats.org/markup-compatibility/2006">
-    <mc:Choice xmlns:p14="http://schemas.microsoft.com/office/powerpoint/2010/main" Requires="p14">
+  <mc:AlternateContent xmlns:mc="http://schemas.openxmlformats.org/markup-compatibility/2006" xmlns:p14="http://schemas.microsoft.com/office/powerpoint/2010/main">
+    <mc:Choice Requires="p14">
       <p:transition spd="med" p14:dur="700">
         <p:fade/>
       </p:transition>
     </mc:Choice>
-    <mc:Fallback>
+    <mc:Fallback xmlns="">
       <p:transition spd="med">
         <p:fade/>
       </p:transition>
@@ -4807,36 +4807,6 @@
       </p:pic>
       <p:pic>
         <p:nvPicPr>
-          <p:cNvPr id="23" name="Picture 22">
-            <a:extLst>
-              <a:ext uri="{FF2B5EF4-FFF2-40B4-BE49-F238E27FC236}">
-                <a16:creationId xmlns:a16="http://schemas.microsoft.com/office/drawing/2014/main" id="{2B029E01-4473-3100-FAA6-5BF85D232684}"/>
-              </a:ext>
-            </a:extLst>
-          </p:cNvPr>
-          <p:cNvPicPr>
-            <a:picLocks noChangeAspect="1"/>
-          </p:cNvPicPr>
-          <p:nvPr/>
-        </p:nvPicPr>
-        <p:blipFill>
-          <a:blip r:embed="rId4"/>
-          <a:stretch>
-            <a:fillRect/>
-          </a:stretch>
-        </p:blipFill>
-        <p:spPr>
-          <a:xfrm>
-            <a:off x="593190" y="2535707"/>
-            <a:ext cx="4288086" cy="3034969"/>
-          </a:xfrm>
-          <a:prstGeom prst="rect">
-            <a:avLst/>
-          </a:prstGeom>
-        </p:spPr>
-      </p:pic>
-      <p:pic>
-        <p:nvPicPr>
           <p:cNvPr id="29" name="Picture 28">
             <a:extLst>
               <a:ext uri="{FF2B5EF4-FFF2-40B4-BE49-F238E27FC236}">
@@ -4850,7 +4820,7 @@
           <p:nvPr/>
         </p:nvPicPr>
         <p:blipFill>
-          <a:blip r:embed="rId5">
+          <a:blip r:embed="rId4">
             <a:extLst>
               <a:ext uri="{28A0092B-C50C-407E-A947-70E740481C1C}">
                 <a14:useLocalDpi xmlns:a14="http://schemas.microsoft.com/office/drawing/2010/main" val="0"/>
@@ -4871,6 +4841,36 @@
           </a:prstGeom>
         </p:spPr>
       </p:pic>
+      <p:pic>
+        <p:nvPicPr>
+          <p:cNvPr id="4" name="Picture 3">
+            <a:extLst>
+              <a:ext uri="{FF2B5EF4-FFF2-40B4-BE49-F238E27FC236}">
+                <a16:creationId xmlns:a16="http://schemas.microsoft.com/office/drawing/2014/main" id="{6BF46C53-1A88-308B-FB52-A0C49F82F292}"/>
+              </a:ext>
+            </a:extLst>
+          </p:cNvPr>
+          <p:cNvPicPr>
+            <a:picLocks noChangeAspect="1"/>
+          </p:cNvPicPr>
+          <p:nvPr/>
+        </p:nvPicPr>
+        <p:blipFill>
+          <a:blip r:embed="rId5"/>
+          <a:stretch>
+            <a:fillRect/>
+          </a:stretch>
+        </p:blipFill>
+        <p:spPr>
+          <a:xfrm>
+            <a:off x="874224" y="2501210"/>
+            <a:ext cx="4056380" cy="3133204"/>
+          </a:xfrm>
+          <a:prstGeom prst="rect">
+            <a:avLst/>
+          </a:prstGeom>
+        </p:spPr>
+      </p:pic>
     </p:spTree>
     <p:extLst>
       <p:ext uri="{BB962C8B-B14F-4D97-AF65-F5344CB8AC3E}">
@@ -4881,13 +4881,13 @@
   <p:clrMapOvr>
     <a:masterClrMapping/>
   </p:clrMapOvr>
-  <mc:AlternateContent xmlns:mc="http://schemas.openxmlformats.org/markup-compatibility/2006">
-    <mc:Choice xmlns:p14="http://schemas.microsoft.com/office/powerpoint/2010/main" Requires="p14">
+  <mc:AlternateContent xmlns:mc="http://schemas.openxmlformats.org/markup-compatibility/2006" xmlns:p14="http://schemas.microsoft.com/office/powerpoint/2010/main">
+    <mc:Choice Requires="p14">
       <p:transition spd="med" p14:dur="700">
         <p:fade/>
       </p:transition>
     </mc:Choice>
-    <mc:Fallback>
+    <mc:Fallback xmlns="">
       <p:transition spd="med">
         <p:fade/>
       </p:transition>
@@ -5697,13 +5697,13 @@
   <p:clrMapOvr>
     <a:masterClrMapping/>
   </p:clrMapOvr>
-  <mc:AlternateContent xmlns:mc="http://schemas.openxmlformats.org/markup-compatibility/2006">
-    <mc:Choice xmlns:p14="http://schemas.microsoft.com/office/powerpoint/2010/main" Requires="p14">
+  <mc:AlternateContent xmlns:mc="http://schemas.openxmlformats.org/markup-compatibility/2006" xmlns:p14="http://schemas.microsoft.com/office/powerpoint/2010/main">
+    <mc:Choice Requires="p14">
       <p:transition spd="med" p14:dur="700">
         <p:fade/>
       </p:transition>
     </mc:Choice>
-    <mc:Fallback>
+    <mc:Fallback xmlns="">
       <p:transition spd="med">
         <p:fade/>
       </p:transition>
@@ -6483,13 +6483,13 @@
   <p:clrMapOvr>
     <a:masterClrMapping/>
   </p:clrMapOvr>
-  <mc:AlternateContent xmlns:mc="http://schemas.openxmlformats.org/markup-compatibility/2006">
-    <mc:Choice xmlns:p14="http://schemas.microsoft.com/office/powerpoint/2010/main" Requires="p14">
+  <mc:AlternateContent xmlns:mc="http://schemas.openxmlformats.org/markup-compatibility/2006" xmlns:p14="http://schemas.microsoft.com/office/powerpoint/2010/main">
+    <mc:Choice Requires="p14">
       <p:transition spd="med" p14:dur="700">
         <p:fade/>
       </p:transition>
     </mc:Choice>
-    <mc:Fallback>
+    <mc:Fallback xmlns="">
       <p:transition spd="med">
         <p:fade/>
       </p:transition>
@@ -7252,13 +7252,13 @@
   <p:clrMapOvr>
     <a:masterClrMapping/>
   </p:clrMapOvr>
-  <mc:AlternateContent xmlns:mc="http://schemas.openxmlformats.org/markup-compatibility/2006">
-    <mc:Choice xmlns:p14="http://schemas.microsoft.com/office/powerpoint/2010/main" Requires="p14">
+  <mc:AlternateContent xmlns:mc="http://schemas.openxmlformats.org/markup-compatibility/2006" xmlns:p14="http://schemas.microsoft.com/office/powerpoint/2010/main">
+    <mc:Choice Requires="p14">
       <p:transition spd="med" p14:dur="700">
         <p:fade/>
       </p:transition>
     </mc:Choice>
-    <mc:Fallback>
+    <mc:Fallback xmlns="">
       <p:transition spd="med">
         <p:fade/>
       </p:transition>
@@ -8120,13 +8120,13 @@
   <p:clrMapOvr>
     <a:masterClrMapping/>
   </p:clrMapOvr>
-  <mc:AlternateContent xmlns:mc="http://schemas.openxmlformats.org/markup-compatibility/2006">
-    <mc:Choice xmlns:p14="http://schemas.microsoft.com/office/powerpoint/2010/main" Requires="p14">
+  <mc:AlternateContent xmlns:mc="http://schemas.openxmlformats.org/markup-compatibility/2006" xmlns:p14="http://schemas.microsoft.com/office/powerpoint/2010/main">
+    <mc:Choice Requires="p14">
       <p:transition spd="med" p14:dur="700">
         <p:fade/>
       </p:transition>
     </mc:Choice>
-    <mc:Fallback>
+    <mc:Fallback xmlns="">
       <p:transition spd="med">
         <p:fade/>
       </p:transition>
@@ -8944,13 +8944,13 @@
   <p:clrMapOvr>
     <a:masterClrMapping/>
   </p:clrMapOvr>
-  <mc:AlternateContent xmlns:mc="http://schemas.openxmlformats.org/markup-compatibility/2006">
-    <mc:Choice xmlns:p14="http://schemas.microsoft.com/office/powerpoint/2010/main" Requires="p14">
+  <mc:AlternateContent xmlns:mc="http://schemas.openxmlformats.org/markup-compatibility/2006" xmlns:p14="http://schemas.microsoft.com/office/powerpoint/2010/main">
+    <mc:Choice Requires="p14">
       <p:transition spd="med" p14:dur="700">
         <p:fade/>
       </p:transition>
     </mc:Choice>
-    <mc:Fallback>
+    <mc:Fallback xmlns="">
       <p:transition spd="med">
         <p:fade/>
       </p:transition>
@@ -9775,10 +9775,10 @@
       </p:sp>
       <p:pic>
         <p:nvPicPr>
-          <p:cNvPr id="10" name="Picture 9">
+          <p:cNvPr id="4" name="Picture 3">
             <a:extLst>
               <a:ext uri="{FF2B5EF4-FFF2-40B4-BE49-F238E27FC236}">
-                <a16:creationId xmlns:a16="http://schemas.microsoft.com/office/drawing/2014/main" id="{F2F5D8B2-911A-53FE-75C8-2F705F7FC677}"/>
+                <a16:creationId xmlns:a16="http://schemas.microsoft.com/office/drawing/2014/main" id="{645E2223-B682-7838-AFF9-E55F8AF7454E}"/>
               </a:ext>
             </a:extLst>
           </p:cNvPr>
@@ -9795,8 +9795,8 @@
         </p:blipFill>
         <p:spPr>
           <a:xfrm>
-            <a:off x="171451" y="1057656"/>
-            <a:ext cx="11725718" cy="2569701"/>
+            <a:off x="171451" y="1073753"/>
+            <a:ext cx="11725718" cy="2628749"/>
           </a:xfrm>
           <a:prstGeom prst="rect">
             <a:avLst/>
@@ -9813,13 +9813,13 @@
   <p:clrMapOvr>
     <a:masterClrMapping/>
   </p:clrMapOvr>
-  <mc:AlternateContent xmlns:mc="http://schemas.openxmlformats.org/markup-compatibility/2006">
-    <mc:Choice xmlns:p14="http://schemas.microsoft.com/office/powerpoint/2010/main" Requires="p14">
+  <mc:AlternateContent xmlns:mc="http://schemas.openxmlformats.org/markup-compatibility/2006" xmlns:p14="http://schemas.microsoft.com/office/powerpoint/2010/main">
+    <mc:Choice Requires="p14">
       <p:transition spd="med" p14:dur="700">
         <p:fade/>
       </p:transition>
     </mc:Choice>
-    <mc:Fallback>
+    <mc:Fallback xmlns="">
       <p:transition spd="med">
         <p:fade/>
       </p:transition>
@@ -10498,13 +10498,13 @@
   <p:clrMapOvr>
     <a:masterClrMapping/>
   </p:clrMapOvr>
-  <mc:AlternateContent xmlns:mc="http://schemas.openxmlformats.org/markup-compatibility/2006">
-    <mc:Choice xmlns:p14="http://schemas.microsoft.com/office/powerpoint/2010/main" Requires="p14">
+  <mc:AlternateContent xmlns:mc="http://schemas.openxmlformats.org/markup-compatibility/2006" xmlns:p14="http://schemas.microsoft.com/office/powerpoint/2010/main">
+    <mc:Choice Requires="p14">
       <p:transition spd="med" p14:dur="700">
         <p:fade/>
       </p:transition>
     </mc:Choice>
-    <mc:Fallback>
+    <mc:Fallback xmlns="">
       <p:transition spd="med">
         <p:fade/>
       </p:transition>
@@ -10710,13 +10710,13 @@
   <p:clrMapOvr>
     <a:masterClrMapping/>
   </p:clrMapOvr>
-  <mc:AlternateContent xmlns:mc="http://schemas.openxmlformats.org/markup-compatibility/2006">
-    <mc:Choice xmlns:p14="http://schemas.microsoft.com/office/powerpoint/2010/main" Requires="p14">
+  <mc:AlternateContent xmlns:mc="http://schemas.openxmlformats.org/markup-compatibility/2006" xmlns:p14="http://schemas.microsoft.com/office/powerpoint/2010/main">
+    <mc:Choice Requires="p14">
       <p:transition spd="med" p14:dur="700">
         <p:fade/>
       </p:transition>
     </mc:Choice>
-    <mc:Fallback>
+    <mc:Fallback xmlns="">
       <p:transition spd="med">
         <p:fade/>
       </p:transition>
@@ -13131,13 +13131,13 @@
   <p:clrMapOvr>
     <a:masterClrMapping/>
   </p:clrMapOvr>
-  <mc:AlternateContent xmlns:mc="http://schemas.openxmlformats.org/markup-compatibility/2006">
-    <mc:Choice xmlns:p14="http://schemas.microsoft.com/office/powerpoint/2010/main" Requires="p14">
+  <mc:AlternateContent xmlns:mc="http://schemas.openxmlformats.org/markup-compatibility/2006" xmlns:p14="http://schemas.microsoft.com/office/powerpoint/2010/main">
+    <mc:Choice Requires="p14">
       <p:transition spd="med" p14:dur="700">
         <p:fade/>
       </p:transition>
     </mc:Choice>
-    <mc:Fallback>
+    <mc:Fallback xmlns="">
       <p:transition spd="med">
         <p:fade/>
       </p:transition>
@@ -13970,13 +13970,13 @@
   <p:clrMapOvr>
     <a:masterClrMapping/>
   </p:clrMapOvr>
-  <mc:AlternateContent xmlns:mc="http://schemas.openxmlformats.org/markup-compatibility/2006">
-    <mc:Choice xmlns:p14="http://schemas.microsoft.com/office/powerpoint/2010/main" Requires="p14">
+  <mc:AlternateContent xmlns:mc="http://schemas.openxmlformats.org/markup-compatibility/2006" xmlns:p14="http://schemas.microsoft.com/office/powerpoint/2010/main">
+    <mc:Choice Requires="p14">
       <p:transition spd="med" p14:dur="700">
         <p:fade/>
       </p:transition>
     </mc:Choice>
-    <mc:Fallback>
+    <mc:Fallback xmlns="">
       <p:transition spd="med">
         <p:fade/>
       </p:transition>
@@ -14863,13 +14863,13 @@
   <p:clrMapOvr>
     <a:masterClrMapping/>
   </p:clrMapOvr>
-  <mc:AlternateContent xmlns:mc="http://schemas.openxmlformats.org/markup-compatibility/2006">
-    <mc:Choice xmlns:p14="http://schemas.microsoft.com/office/powerpoint/2010/main" Requires="p14">
+  <mc:AlternateContent xmlns:mc="http://schemas.openxmlformats.org/markup-compatibility/2006" xmlns:p14="http://schemas.microsoft.com/office/powerpoint/2010/main">
+    <mc:Choice Requires="p14">
       <p:transition spd="med" p14:dur="700">
         <p:fade/>
       </p:transition>
     </mc:Choice>
-    <mc:Fallback>
+    <mc:Fallback xmlns="">
       <p:transition spd="med">
         <p:fade/>
       </p:transition>
@@ -15644,13 +15644,13 @@
   <p:clrMapOvr>
     <a:masterClrMapping/>
   </p:clrMapOvr>
-  <mc:AlternateContent xmlns:mc="http://schemas.openxmlformats.org/markup-compatibility/2006">
-    <mc:Choice xmlns:p14="http://schemas.microsoft.com/office/powerpoint/2010/main" Requires="p14">
+  <mc:AlternateContent xmlns:mc="http://schemas.openxmlformats.org/markup-compatibility/2006" xmlns:p14="http://schemas.microsoft.com/office/powerpoint/2010/main">
+    <mc:Choice Requires="p14">
       <p:transition spd="med" p14:dur="700">
         <p:fade/>
       </p:transition>
     </mc:Choice>
-    <mc:Fallback>
+    <mc:Fallback xmlns="">
       <p:transition spd="med">
         <p:fade/>
       </p:transition>
@@ -16324,13 +16324,13 @@
   <p:clrMapOvr>
     <a:masterClrMapping/>
   </p:clrMapOvr>
-  <mc:AlternateContent xmlns:mc="http://schemas.openxmlformats.org/markup-compatibility/2006">
-    <mc:Choice xmlns:p14="http://schemas.microsoft.com/office/powerpoint/2010/main" Requires="p14">
+  <mc:AlternateContent xmlns:mc="http://schemas.openxmlformats.org/markup-compatibility/2006" xmlns:p14="http://schemas.microsoft.com/office/powerpoint/2010/main">
+    <mc:Choice Requires="p14">
       <p:transition spd="med" p14:dur="700">
         <p:fade/>
       </p:transition>
     </mc:Choice>
-    <mc:Fallback>
+    <mc:Fallback xmlns="">
       <p:transition spd="med">
         <p:fade/>
       </p:transition>
@@ -16568,13 +16568,13 @@
   <p:clrMapOvr>
     <a:masterClrMapping/>
   </p:clrMapOvr>
-  <mc:AlternateContent xmlns:mc="http://schemas.openxmlformats.org/markup-compatibility/2006">
-    <mc:Choice xmlns:p14="http://schemas.microsoft.com/office/powerpoint/2010/main" Requires="p14">
+  <mc:AlternateContent xmlns:mc="http://schemas.openxmlformats.org/markup-compatibility/2006" xmlns:p14="http://schemas.microsoft.com/office/powerpoint/2010/main">
+    <mc:Choice Requires="p14">
       <p:transition spd="med" p14:dur="700">
         <p:fade/>
       </p:transition>
     </mc:Choice>
-    <mc:Fallback>
+    <mc:Fallback xmlns="">
       <p:transition spd="med">
         <p:fade/>
       </p:transition>
@@ -21555,13 +21555,13 @@
   <p:clrMapOvr>
     <a:masterClrMapping/>
   </p:clrMapOvr>
-  <mc:AlternateContent xmlns:mc="http://schemas.openxmlformats.org/markup-compatibility/2006">
-    <mc:Choice xmlns:p14="http://schemas.microsoft.com/office/powerpoint/2010/main" Requires="p14">
+  <mc:AlternateContent xmlns:mc="http://schemas.openxmlformats.org/markup-compatibility/2006" xmlns:p14="http://schemas.microsoft.com/office/powerpoint/2010/main">
+    <mc:Choice Requires="p14">
       <p:transition spd="med" p14:dur="700">
         <p:fade/>
       </p:transition>
     </mc:Choice>
-    <mc:Fallback>
+    <mc:Fallback xmlns="">
       <p:transition spd="med">
         <p:fade/>
       </p:transition>
@@ -27324,13 +27324,13 @@
   <p:clrMapOvr>
     <a:masterClrMapping/>
   </p:clrMapOvr>
-  <mc:AlternateContent xmlns:mc="http://schemas.openxmlformats.org/markup-compatibility/2006">
-    <mc:Choice xmlns:p14="http://schemas.microsoft.com/office/powerpoint/2010/main" Requires="p14">
+  <mc:AlternateContent xmlns:mc="http://schemas.openxmlformats.org/markup-compatibility/2006" xmlns:p14="http://schemas.microsoft.com/office/powerpoint/2010/main">
+    <mc:Choice Requires="p14">
       <p:transition spd="med" p14:dur="700">
         <p:fade/>
       </p:transition>
     </mc:Choice>
-    <mc:Fallback>
+    <mc:Fallback xmlns="">
       <p:transition spd="med">
         <p:fade/>
       </p:transition>
@@ -27878,13 +27878,13 @@
   <p:clrMapOvr>
     <a:masterClrMapping/>
   </p:clrMapOvr>
-  <mc:AlternateContent xmlns:mc="http://schemas.openxmlformats.org/markup-compatibility/2006">
-    <mc:Choice xmlns:p14="http://schemas.microsoft.com/office/powerpoint/2010/main" Requires="p14">
+  <mc:AlternateContent xmlns:mc="http://schemas.openxmlformats.org/markup-compatibility/2006" xmlns:p14="http://schemas.microsoft.com/office/powerpoint/2010/main">
+    <mc:Choice Requires="p14">
       <p:transition spd="med" p14:dur="700">
         <p:fade/>
       </p:transition>
     </mc:Choice>
-    <mc:Fallback>
+    <mc:Fallback xmlns="">
       <p:transition spd="med">
         <p:fade/>
       </p:transition>
@@ -28476,13 +28476,13 @@
   <p:clrMapOvr>
     <a:masterClrMapping/>
   </p:clrMapOvr>
-  <mc:AlternateContent xmlns:mc="http://schemas.openxmlformats.org/markup-compatibility/2006">
-    <mc:Choice xmlns:p14="http://schemas.microsoft.com/office/powerpoint/2010/main" Requires="p14">
+  <mc:AlternateContent xmlns:mc="http://schemas.openxmlformats.org/markup-compatibility/2006" xmlns:p14="http://schemas.microsoft.com/office/powerpoint/2010/main">
+    <mc:Choice Requires="p14">
       <p:transition spd="med" p14:dur="700">
         <p:fade/>
       </p:transition>
     </mc:Choice>
-    <mc:Fallback>
+    <mc:Fallback xmlns="">
       <p:transition spd="med">
         <p:fade/>
       </p:transition>
@@ -28753,13 +28753,13 @@
   <p:clrMapOvr>
     <a:masterClrMapping/>
   </p:clrMapOvr>
-  <mc:AlternateContent xmlns:mc="http://schemas.openxmlformats.org/markup-compatibility/2006">
-    <mc:Choice xmlns:p14="http://schemas.microsoft.com/office/powerpoint/2010/main" Requires="p14">
+  <mc:AlternateContent xmlns:mc="http://schemas.openxmlformats.org/markup-compatibility/2006" xmlns:p14="http://schemas.microsoft.com/office/powerpoint/2010/main">
+    <mc:Choice Requires="p14">
       <p:transition spd="med" p14:dur="700">
         <p:fade/>
       </p:transition>
     </mc:Choice>
-    <mc:Fallback>
+    <mc:Fallback xmlns="">
       <p:transition spd="med">
         <p:fade/>
       </p:transition>
@@ -29136,13 +29136,13 @@
   <p:clrMapOvr>
     <a:masterClrMapping/>
   </p:clrMapOvr>
-  <mc:AlternateContent xmlns:mc="http://schemas.openxmlformats.org/markup-compatibility/2006">
-    <mc:Choice xmlns:p14="http://schemas.microsoft.com/office/powerpoint/2010/main" Requires="p14">
+  <mc:AlternateContent xmlns:mc="http://schemas.openxmlformats.org/markup-compatibility/2006" xmlns:p14="http://schemas.microsoft.com/office/powerpoint/2010/main">
+    <mc:Choice Requires="p14">
       <p:transition spd="med" p14:dur="700">
         <p:fade/>
       </p:transition>
     </mc:Choice>
-    <mc:Fallback>
+    <mc:Fallback xmlns="">
       <p:transition spd="med">
         <p:fade/>
       </p:transition>
@@ -29461,13 +29461,13 @@
   <p:clrMapOvr>
     <a:masterClrMapping/>
   </p:clrMapOvr>
-  <mc:AlternateContent xmlns:mc="http://schemas.openxmlformats.org/markup-compatibility/2006">
-    <mc:Choice xmlns:p14="http://schemas.microsoft.com/office/powerpoint/2010/main" Requires="p14">
+  <mc:AlternateContent xmlns:mc="http://schemas.openxmlformats.org/markup-compatibility/2006" xmlns:p14="http://schemas.microsoft.com/office/powerpoint/2010/main">
+    <mc:Choice Requires="p14">
       <p:transition spd="med" p14:dur="700">
         <p:fade/>
       </p:transition>
     </mc:Choice>
-    <mc:Fallback>
+    <mc:Fallback xmlns="">
       <p:transition spd="med">
         <p:fade/>
       </p:transition>
@@ -29699,13 +29699,13 @@
   <p:clrMapOvr>
     <a:masterClrMapping/>
   </p:clrMapOvr>
-  <mc:AlternateContent xmlns:mc="http://schemas.openxmlformats.org/markup-compatibility/2006">
-    <mc:Choice xmlns:p14="http://schemas.microsoft.com/office/powerpoint/2010/main" Requires="p14">
+  <mc:AlternateContent xmlns:mc="http://schemas.openxmlformats.org/markup-compatibility/2006" xmlns:p14="http://schemas.microsoft.com/office/powerpoint/2010/main">
+    <mc:Choice Requires="p14">
       <p:transition spd="med" p14:dur="700">
         <p:fade/>
       </p:transition>
     </mc:Choice>
-    <mc:Fallback>
+    <mc:Fallback xmlns="">
       <p:transition spd="med">
         <p:fade/>
       </p:transition>
@@ -30766,13 +30766,13 @@
   <p:clrMapOvr>
     <a:masterClrMapping/>
   </p:clrMapOvr>
-  <mc:AlternateContent xmlns:mc="http://schemas.openxmlformats.org/markup-compatibility/2006">
-    <mc:Choice xmlns:p14="http://schemas.microsoft.com/office/powerpoint/2010/main" Requires="p14">
+  <mc:AlternateContent xmlns:mc="http://schemas.openxmlformats.org/markup-compatibility/2006" xmlns:p14="http://schemas.microsoft.com/office/powerpoint/2010/main">
+    <mc:Choice Requires="p14">
       <p:transition spd="med" p14:dur="700">
         <p:fade/>
       </p:transition>
     </mc:Choice>
-    <mc:Fallback>
+    <mc:Fallback xmlns="">
       <p:transition spd="med">
         <p:fade/>
       </p:transition>
@@ -30987,13 +30987,13 @@
   <p:clrMapOvr>
     <a:masterClrMapping/>
   </p:clrMapOvr>
-  <mc:AlternateContent xmlns:mc="http://schemas.openxmlformats.org/markup-compatibility/2006">
-    <mc:Choice xmlns:p14="http://schemas.microsoft.com/office/powerpoint/2010/main" Requires="p14">
+  <mc:AlternateContent xmlns:mc="http://schemas.openxmlformats.org/markup-compatibility/2006" xmlns:p14="http://schemas.microsoft.com/office/powerpoint/2010/main">
+    <mc:Choice Requires="p14">
       <p:transition spd="med" p14:dur="700">
         <p:fade/>
       </p:transition>
     </mc:Choice>
-    <mc:Fallback>
+    <mc:Fallback xmlns="">
       <p:transition spd="med">
         <p:fade/>
       </p:transition>
@@ -31411,13 +31411,13 @@
   <p:clrMapOvr>
     <a:masterClrMapping/>
   </p:clrMapOvr>
-  <mc:AlternateContent xmlns:mc="http://schemas.openxmlformats.org/markup-compatibility/2006">
-    <mc:Choice xmlns:p14="http://schemas.microsoft.com/office/powerpoint/2010/main" Requires="p14">
+  <mc:AlternateContent xmlns:mc="http://schemas.openxmlformats.org/markup-compatibility/2006" xmlns:p14="http://schemas.microsoft.com/office/powerpoint/2010/main">
+    <mc:Choice Requires="p14">
       <p:transition spd="med" p14:dur="700">
         <p:fade/>
       </p:transition>
     </mc:Choice>
-    <mc:Fallback>
+    <mc:Fallback xmlns="">
       <p:transition spd="med">
         <p:fade/>
       </p:transition>
@@ -31622,13 +31622,13 @@
   <p:clrMapOvr>
     <a:masterClrMapping/>
   </p:clrMapOvr>
-  <mc:AlternateContent xmlns:mc="http://schemas.openxmlformats.org/markup-compatibility/2006">
-    <mc:Choice xmlns:p14="http://schemas.microsoft.com/office/powerpoint/2010/main" Requires="p14">
+  <mc:AlternateContent xmlns:mc="http://schemas.openxmlformats.org/markup-compatibility/2006" xmlns:p14="http://schemas.microsoft.com/office/powerpoint/2010/main">
+    <mc:Choice Requires="p14">
       <p:transition spd="med" p14:dur="700">
         <p:fade/>
       </p:transition>
     </mc:Choice>
-    <mc:Fallback>
+    <mc:Fallback xmlns="">
       <p:transition spd="med">
         <p:fade/>
       </p:transition>
@@ -32206,13 +32206,13 @@
   <p:clrMapOvr>
     <a:masterClrMapping/>
   </p:clrMapOvr>
-  <mc:AlternateContent xmlns:mc="http://schemas.openxmlformats.org/markup-compatibility/2006">
-    <mc:Choice xmlns:p14="http://schemas.microsoft.com/office/powerpoint/2010/main" Requires="p14">
+  <mc:AlternateContent xmlns:mc="http://schemas.openxmlformats.org/markup-compatibility/2006" xmlns:p14="http://schemas.microsoft.com/office/powerpoint/2010/main">
+    <mc:Choice Requires="p14">
       <p:transition spd="med" p14:dur="700">
         <p:fade/>
       </p:transition>
     </mc:Choice>
-    <mc:Fallback>
+    <mc:Fallback xmlns="">
       <p:transition spd="med">
         <p:fade/>
       </p:transition>
@@ -32577,13 +32577,13 @@
   <p:clrMapOvr>
     <a:masterClrMapping/>
   </p:clrMapOvr>
-  <mc:AlternateContent xmlns:mc="http://schemas.openxmlformats.org/markup-compatibility/2006">
-    <mc:Choice xmlns:p14="http://schemas.microsoft.com/office/powerpoint/2010/main" Requires="p14">
+  <mc:AlternateContent xmlns:mc="http://schemas.openxmlformats.org/markup-compatibility/2006" xmlns:p14="http://schemas.microsoft.com/office/powerpoint/2010/main">
+    <mc:Choice Requires="p14">
       <p:transition spd="med" p14:dur="700">
         <p:fade/>
       </p:transition>
     </mc:Choice>
-    <mc:Fallback>
+    <mc:Fallback xmlns="">
       <p:transition spd="med">
         <p:fade/>
       </p:transition>
@@ -32939,13 +32939,13 @@
   <p:clrMapOvr>
     <a:masterClrMapping/>
   </p:clrMapOvr>
-  <mc:AlternateContent xmlns:mc="http://schemas.openxmlformats.org/markup-compatibility/2006">
-    <mc:Choice xmlns:p14="http://schemas.microsoft.com/office/powerpoint/2010/main" Requires="p14">
+  <mc:AlternateContent xmlns:mc="http://schemas.openxmlformats.org/markup-compatibility/2006" xmlns:p14="http://schemas.microsoft.com/office/powerpoint/2010/main">
+    <mc:Choice Requires="p14">
       <p:transition spd="med" p14:dur="700">
         <p:fade/>
       </p:transition>
     </mc:Choice>
-    <mc:Fallback>
+    <mc:Fallback xmlns="">
       <p:transition spd="med">
         <p:fade/>
       </p:transition>
@@ -33114,13 +33114,13 @@
   <p:clrMapOvr>
     <a:masterClrMapping/>
   </p:clrMapOvr>
-  <mc:AlternateContent xmlns:mc="http://schemas.openxmlformats.org/markup-compatibility/2006">
-    <mc:Choice xmlns:p14="http://schemas.microsoft.com/office/powerpoint/2010/main" Requires="p14">
+  <mc:AlternateContent xmlns:mc="http://schemas.openxmlformats.org/markup-compatibility/2006" xmlns:p14="http://schemas.microsoft.com/office/powerpoint/2010/main">
+    <mc:Choice Requires="p14">
       <p:transition spd="med" p14:dur="700">
         <p:fade/>
       </p:transition>
     </mc:Choice>
-    <mc:Fallback>
+    <mc:Fallback xmlns="">
       <p:transition spd="med">
         <p:fade/>
       </p:transition>
@@ -33236,13 +33236,13 @@
   <p:clrMapOvr>
     <a:masterClrMapping/>
   </p:clrMapOvr>
-  <mc:AlternateContent xmlns:mc="http://schemas.openxmlformats.org/markup-compatibility/2006">
-    <mc:Choice xmlns:p14="http://schemas.microsoft.com/office/powerpoint/2010/main" Requires="p14">
+  <mc:AlternateContent xmlns:mc="http://schemas.openxmlformats.org/markup-compatibility/2006" xmlns:p14="http://schemas.microsoft.com/office/powerpoint/2010/main">
+    <mc:Choice Requires="p14">
       <p:transition spd="med" p14:dur="700">
         <p:fade/>
       </p:transition>
     </mc:Choice>
-    <mc:Fallback>
+    <mc:Fallback xmlns="">
       <p:transition spd="med">
         <p:fade/>
       </p:transition>
@@ -33552,13 +33552,13 @@
   <p:clrMapOvr>
     <a:masterClrMapping/>
   </p:clrMapOvr>
-  <mc:AlternateContent xmlns:mc="http://schemas.openxmlformats.org/markup-compatibility/2006">
-    <mc:Choice xmlns:p14="http://schemas.microsoft.com/office/powerpoint/2010/main" Requires="p14">
+  <mc:AlternateContent xmlns:mc="http://schemas.openxmlformats.org/markup-compatibility/2006" xmlns:p14="http://schemas.microsoft.com/office/powerpoint/2010/main">
+    <mc:Choice Requires="p14">
       <p:transition spd="med" p14:dur="700">
         <p:fade/>
       </p:transition>
     </mc:Choice>
-    <mc:Fallback>
+    <mc:Fallback xmlns="">
       <p:transition spd="med">
         <p:fade/>
       </p:transition>
@@ -33778,13 +33778,13 @@
   <p:clrMapOvr>
     <a:masterClrMapping/>
   </p:clrMapOvr>
-  <mc:AlternateContent xmlns:mc="http://schemas.openxmlformats.org/markup-compatibility/2006">
-    <mc:Choice xmlns:p14="http://schemas.microsoft.com/office/powerpoint/2010/main" Requires="p14">
+  <mc:AlternateContent xmlns:mc="http://schemas.openxmlformats.org/markup-compatibility/2006" xmlns:p14="http://schemas.microsoft.com/office/powerpoint/2010/main">
+    <mc:Choice Requires="p14">
       <p:transition spd="med" p14:dur="700">
         <p:fade/>
       </p:transition>
     </mc:Choice>
-    <mc:Fallback>
+    <mc:Fallback xmlns="">
       <p:transition spd="med">
         <p:fade/>
       </p:transition>
@@ -33909,13 +33909,13 @@
   <p:clrMapOvr>
     <a:masterClrMapping/>
   </p:clrMapOvr>
-  <mc:AlternateContent xmlns:mc="http://schemas.openxmlformats.org/markup-compatibility/2006">
-    <mc:Choice xmlns:p14="http://schemas.microsoft.com/office/powerpoint/2010/main" Requires="p14">
+  <mc:AlternateContent xmlns:mc="http://schemas.openxmlformats.org/markup-compatibility/2006" xmlns:p14="http://schemas.microsoft.com/office/powerpoint/2010/main">
+    <mc:Choice Requires="p14">
       <p:transition spd="med" p14:dur="700">
         <p:fade/>
       </p:transition>
     </mc:Choice>
-    <mc:Fallback>
+    <mc:Fallback xmlns="">
       <p:transition spd="med">
         <p:fade/>
       </p:transition>
@@ -34166,13 +34166,13 @@
   <p:clrMapOvr>
     <a:masterClrMapping/>
   </p:clrMapOvr>
-  <mc:AlternateContent xmlns:mc="http://schemas.openxmlformats.org/markup-compatibility/2006">
-    <mc:Choice xmlns:p14="http://schemas.microsoft.com/office/powerpoint/2010/main" Requires="p14">
+  <mc:AlternateContent xmlns:mc="http://schemas.openxmlformats.org/markup-compatibility/2006" xmlns:p14="http://schemas.microsoft.com/office/powerpoint/2010/main">
+    <mc:Choice Requires="p14">
       <p:transition spd="med" p14:dur="700">
         <p:fade/>
       </p:transition>
     </mc:Choice>
-    <mc:Fallback>
+    <mc:Fallback xmlns="">
       <p:transition spd="med">
         <p:fade/>
       </p:transition>
@@ -34528,13 +34528,13 @@
   <p:clrMapOvr>
     <a:masterClrMapping/>
   </p:clrMapOvr>
-  <mc:AlternateContent xmlns:mc="http://schemas.openxmlformats.org/markup-compatibility/2006">
-    <mc:Choice xmlns:p14="http://schemas.microsoft.com/office/powerpoint/2010/main" Requires="p14">
+  <mc:AlternateContent xmlns:mc="http://schemas.openxmlformats.org/markup-compatibility/2006" xmlns:p14="http://schemas.microsoft.com/office/powerpoint/2010/main">
+    <mc:Choice Requires="p14">
       <p:transition spd="med" p14:dur="700">
         <p:fade/>
       </p:transition>
     </mc:Choice>
-    <mc:Fallback>
+    <mc:Fallback xmlns="">
       <p:transition spd="med">
         <p:fade/>
       </p:transition>
@@ -34650,13 +34650,13 @@
   <p:clrMapOvr>
     <a:masterClrMapping/>
   </p:clrMapOvr>
-  <mc:AlternateContent xmlns:mc="http://schemas.openxmlformats.org/markup-compatibility/2006">
-    <mc:Choice xmlns:p14="http://schemas.microsoft.com/office/powerpoint/2010/main" Requires="p14">
+  <mc:AlternateContent xmlns:mc="http://schemas.openxmlformats.org/markup-compatibility/2006" xmlns:p14="http://schemas.microsoft.com/office/powerpoint/2010/main">
+    <mc:Choice Requires="p14">
       <p:transition spd="med" p14:dur="700">
         <p:fade/>
       </p:transition>
     </mc:Choice>
-    <mc:Fallback>
+    <mc:Fallback xmlns="">
       <p:transition spd="med">
         <p:fade/>
       </p:transition>
@@ -34950,13 +34950,13 @@
   <p:clrMapOvr>
     <a:masterClrMapping/>
   </p:clrMapOvr>
-  <mc:AlternateContent xmlns:mc="http://schemas.openxmlformats.org/markup-compatibility/2006">
-    <mc:Choice xmlns:p14="http://schemas.microsoft.com/office/powerpoint/2010/main" Requires="p14">
+  <mc:AlternateContent xmlns:mc="http://schemas.openxmlformats.org/markup-compatibility/2006" xmlns:p14="http://schemas.microsoft.com/office/powerpoint/2010/main">
+    <mc:Choice Requires="p14">
       <p:transition spd="med" p14:dur="700">
         <p:fade/>
       </p:transition>
     </mc:Choice>
-    <mc:Fallback>
+    <mc:Fallback xmlns="">
       <p:transition spd="med">
         <p:fade/>
       </p:transition>
@@ -36713,13 +36713,13 @@
   <p:clrMapOvr>
     <a:masterClrMapping/>
   </p:clrMapOvr>
-  <mc:AlternateContent xmlns:mc="http://schemas.openxmlformats.org/markup-compatibility/2006">
-    <mc:Choice xmlns:p14="http://schemas.microsoft.com/office/powerpoint/2010/main" Requires="p14">
+  <mc:AlternateContent xmlns:mc="http://schemas.openxmlformats.org/markup-compatibility/2006" xmlns:p14="http://schemas.microsoft.com/office/powerpoint/2010/main">
+    <mc:Choice Requires="p14">
       <p:transition spd="med" p14:dur="700">
         <p:fade/>
       </p:transition>
     </mc:Choice>
-    <mc:Fallback>
+    <mc:Fallback xmlns="">
       <p:transition spd="med">
         <p:fade/>
       </p:transition>
@@ -37003,13 +37003,13 @@
   <p:clrMapOvr>
     <a:masterClrMapping/>
   </p:clrMapOvr>
-  <mc:AlternateContent xmlns:mc="http://schemas.openxmlformats.org/markup-compatibility/2006">
-    <mc:Choice xmlns:p14="http://schemas.microsoft.com/office/powerpoint/2010/main" Requires="p14">
+  <mc:AlternateContent xmlns:mc="http://schemas.openxmlformats.org/markup-compatibility/2006" xmlns:p14="http://schemas.microsoft.com/office/powerpoint/2010/main">
+    <mc:Choice Requires="p14">
       <p:transition spd="med" p14:dur="700">
         <p:fade/>
       </p:transition>
     </mc:Choice>
-    <mc:Fallback>
+    <mc:Fallback xmlns="">
       <p:transition spd="med">
         <p:fade/>
       </p:transition>
@@ -37283,13 +37283,13 @@
   <p:clrMapOvr>
     <a:masterClrMapping/>
   </p:clrMapOvr>
-  <mc:AlternateContent xmlns:mc="http://schemas.openxmlformats.org/markup-compatibility/2006">
-    <mc:Choice xmlns:p14="http://schemas.microsoft.com/office/powerpoint/2010/main" Requires="p14">
+  <mc:AlternateContent xmlns:mc="http://schemas.openxmlformats.org/markup-compatibility/2006" xmlns:p14="http://schemas.microsoft.com/office/powerpoint/2010/main">
+    <mc:Choice Requires="p14">
       <p:transition spd="med" p14:dur="700">
         <p:fade/>
       </p:transition>
     </mc:Choice>
-    <mc:Fallback>
+    <mc:Fallback xmlns="">
       <p:transition spd="med">
         <p:fade/>
       </p:transition>
@@ -37579,13 +37579,13 @@
   <p:clrMapOvr>
     <a:masterClrMapping/>
   </p:clrMapOvr>
-  <mc:AlternateContent xmlns:mc="http://schemas.openxmlformats.org/markup-compatibility/2006">
-    <mc:Choice xmlns:p14="http://schemas.microsoft.com/office/powerpoint/2010/main" Requires="p14">
+  <mc:AlternateContent xmlns:mc="http://schemas.openxmlformats.org/markup-compatibility/2006" xmlns:p14="http://schemas.microsoft.com/office/powerpoint/2010/main">
+    <mc:Choice Requires="p14">
       <p:transition spd="med" p14:dur="700">
         <p:fade/>
       </p:transition>
     </mc:Choice>
-    <mc:Fallback>
+    <mc:Fallback xmlns="">
       <p:transition spd="med">
         <p:fade/>
       </p:transition>
@@ -38626,13 +38626,13 @@
   <p:clrMapOvr>
     <a:masterClrMapping/>
   </p:clrMapOvr>
-  <mc:AlternateContent xmlns:mc="http://schemas.openxmlformats.org/markup-compatibility/2006">
-    <mc:Choice xmlns:p14="http://schemas.microsoft.com/office/powerpoint/2010/main" Requires="p14">
+  <mc:AlternateContent xmlns:mc="http://schemas.openxmlformats.org/markup-compatibility/2006" xmlns:p14="http://schemas.microsoft.com/office/powerpoint/2010/main">
+    <mc:Choice Requires="p14">
       <p:transition spd="med" p14:dur="700">
         <p:fade/>
       </p:transition>
     </mc:Choice>
-    <mc:Fallback>
+    <mc:Fallback xmlns="">
       <p:transition spd="med">
         <p:fade/>
       </p:transition>
